--- a/ppt/chapter5/driver.pptx
+++ b/ppt/chapter5/driver.pptx
@@ -2,19 +2,20 @@
 <file path=ppt/presentation.xml><?xml version="1.0" encoding="utf-8"?>
 <p:presentation xmlns:a="http://schemas.openxmlformats.org/drawingml/2006/main" xmlns:r="http://schemas.openxmlformats.org/officeDocument/2006/relationships" xmlns:p="http://schemas.openxmlformats.org/presentationml/2006/main" saveSubsetFonts="1">
   <p:sldMasterIdLst>
-    <p:sldMasterId id="2147483648" r:id="rId1"/>
+    <p:sldMasterId id="2147483684" r:id="rId1"/>
   </p:sldMasterIdLst>
   <p:sldIdLst>
     <p:sldId id="256" r:id="rId2"/>
     <p:sldId id="257" r:id="rId3"/>
+    <p:sldId id="258" r:id="rId4"/>
   </p:sldIdLst>
-  <p:sldSz cx="12192000" cy="6858000"/>
+  <p:sldSz cx="6119813" cy="3959225"/>
   <p:notesSz cx="6858000" cy="9144000"/>
   <p:defaultTextStyle>
     <a:defPPr>
-      <a:defRPr lang="zh-CN"/>
+      <a:defRPr lang="en-US"/>
     </a:defPPr>
-    <a:lvl1pPr marL="0" algn="l" defTabSz="914400" rtl="0" eaLnBrk="1" latinLnBrk="0" hangingPunct="1">
+    <a:lvl1pPr marL="0" algn="l" defTabSz="457200" rtl="0" eaLnBrk="1" latinLnBrk="0" hangingPunct="1">
       <a:defRPr sz="1800" kern="1200">
         <a:solidFill>
           <a:schemeClr val="tx1"/>
@@ -24,7 +25,7 @@
         <a:cs typeface="+mn-cs"/>
       </a:defRPr>
     </a:lvl1pPr>
-    <a:lvl2pPr marL="457200" algn="l" defTabSz="914400" rtl="0" eaLnBrk="1" latinLnBrk="0" hangingPunct="1">
+    <a:lvl2pPr marL="457200" algn="l" defTabSz="457200" rtl="0" eaLnBrk="1" latinLnBrk="0" hangingPunct="1">
       <a:defRPr sz="1800" kern="1200">
         <a:solidFill>
           <a:schemeClr val="tx1"/>
@@ -34,7 +35,7 @@
         <a:cs typeface="+mn-cs"/>
       </a:defRPr>
     </a:lvl2pPr>
-    <a:lvl3pPr marL="914400" algn="l" defTabSz="914400" rtl="0" eaLnBrk="1" latinLnBrk="0" hangingPunct="1">
+    <a:lvl3pPr marL="914400" algn="l" defTabSz="457200" rtl="0" eaLnBrk="1" latinLnBrk="0" hangingPunct="1">
       <a:defRPr sz="1800" kern="1200">
         <a:solidFill>
           <a:schemeClr val="tx1"/>
@@ -44,7 +45,7 @@
         <a:cs typeface="+mn-cs"/>
       </a:defRPr>
     </a:lvl3pPr>
-    <a:lvl4pPr marL="1371600" algn="l" defTabSz="914400" rtl="0" eaLnBrk="1" latinLnBrk="0" hangingPunct="1">
+    <a:lvl4pPr marL="1371600" algn="l" defTabSz="457200" rtl="0" eaLnBrk="1" latinLnBrk="0" hangingPunct="1">
       <a:defRPr sz="1800" kern="1200">
         <a:solidFill>
           <a:schemeClr val="tx1"/>
@@ -54,7 +55,7 @@
         <a:cs typeface="+mn-cs"/>
       </a:defRPr>
     </a:lvl4pPr>
-    <a:lvl5pPr marL="1828800" algn="l" defTabSz="914400" rtl="0" eaLnBrk="1" latinLnBrk="0" hangingPunct="1">
+    <a:lvl5pPr marL="1828800" algn="l" defTabSz="457200" rtl="0" eaLnBrk="1" latinLnBrk="0" hangingPunct="1">
       <a:defRPr sz="1800" kern="1200">
         <a:solidFill>
           <a:schemeClr val="tx1"/>
@@ -64,7 +65,7 @@
         <a:cs typeface="+mn-cs"/>
       </a:defRPr>
     </a:lvl5pPr>
-    <a:lvl6pPr marL="2286000" algn="l" defTabSz="914400" rtl="0" eaLnBrk="1" latinLnBrk="0" hangingPunct="1">
+    <a:lvl6pPr marL="2286000" algn="l" defTabSz="457200" rtl="0" eaLnBrk="1" latinLnBrk="0" hangingPunct="1">
       <a:defRPr sz="1800" kern="1200">
         <a:solidFill>
           <a:schemeClr val="tx1"/>
@@ -74,7 +75,7 @@
         <a:cs typeface="+mn-cs"/>
       </a:defRPr>
     </a:lvl6pPr>
-    <a:lvl7pPr marL="2743200" algn="l" defTabSz="914400" rtl="0" eaLnBrk="1" latinLnBrk="0" hangingPunct="1">
+    <a:lvl7pPr marL="2743200" algn="l" defTabSz="457200" rtl="0" eaLnBrk="1" latinLnBrk="0" hangingPunct="1">
       <a:defRPr sz="1800" kern="1200">
         <a:solidFill>
           <a:schemeClr val="tx1"/>
@@ -84,7 +85,7 @@
         <a:cs typeface="+mn-cs"/>
       </a:defRPr>
     </a:lvl7pPr>
-    <a:lvl8pPr marL="3200400" algn="l" defTabSz="914400" rtl="0" eaLnBrk="1" latinLnBrk="0" hangingPunct="1">
+    <a:lvl8pPr marL="3200400" algn="l" defTabSz="457200" rtl="0" eaLnBrk="1" latinLnBrk="0" hangingPunct="1">
       <a:defRPr sz="1800" kern="1200">
         <a:solidFill>
           <a:schemeClr val="tx1"/>
@@ -94,7 +95,7 @@
         <a:cs typeface="+mn-cs"/>
       </a:defRPr>
     </a:lvl8pPr>
-    <a:lvl9pPr marL="3657600" algn="l" defTabSz="914400" rtl="0" eaLnBrk="1" latinLnBrk="0" hangingPunct="1">
+    <a:lvl9pPr marL="3657600" algn="l" defTabSz="457200" rtl="0" eaLnBrk="1" latinLnBrk="0" hangingPunct="1">
       <a:defRPr sz="1800" kern="1200">
         <a:solidFill>
           <a:schemeClr val="tx1"/>
@@ -108,42 +109,42 @@
   <p:extLst>
     <p:ext uri="{EFAFB233-063F-42B5-8137-9DF3F51BA10A}">
       <p15:sldGuideLst xmlns:p15="http://schemas.microsoft.com/office/powerpoint/2012/main">
-        <p15:guide id="1" orient="horz" pos="777" userDrawn="1">
+        <p15:guide id="1" orient="horz" pos="136" userDrawn="1">
           <p15:clr>
             <a:srgbClr val="A4A3A4"/>
           </p15:clr>
         </p15:guide>
-        <p15:guide id="2" pos="3704" userDrawn="1">
+        <p15:guide id="2" pos="1860" userDrawn="1">
           <p15:clr>
             <a:srgbClr val="A4A3A4"/>
           </p15:clr>
         </p15:guide>
-        <p15:guide id="3" orient="horz" pos="2659" userDrawn="1">
+        <p15:guide id="3" orient="horz" pos="2449" userDrawn="1">
           <p15:clr>
             <a:srgbClr val="A4A3A4"/>
           </p15:clr>
         </p15:guide>
-        <p15:guide id="4" pos="3885" userDrawn="1">
+        <p15:guide id="4" pos="3198" userDrawn="1">
           <p15:clr>
             <a:srgbClr val="A4A3A4"/>
           </p15:clr>
         </p15:guide>
-        <p15:guide id="5" pos="665" userDrawn="1">
+        <p15:guide id="5" pos="680" userDrawn="1">
           <p15:clr>
             <a:srgbClr val="A4A3A4"/>
           </p15:clr>
         </p15:guide>
-        <p15:guide id="6" pos="143" userDrawn="1">
+        <p15:guide id="6" pos="45" userDrawn="1">
           <p15:clr>
             <a:srgbClr val="A4A3A4"/>
           </p15:clr>
         </p15:guide>
-        <p15:guide id="7" pos="3182" userDrawn="1">
+        <p15:guide id="7" pos="1597" userDrawn="1">
           <p15:clr>
             <a:srgbClr val="A4A3A4"/>
           </p15:clr>
         </p15:guide>
-        <p15:guide id="8" pos="7514" userDrawn="1">
+        <p15:guide id="8" pos="3742" userDrawn="1">
           <p15:clr>
             <a:srgbClr val="A4A3A4"/>
           </p15:clr>
@@ -173,13 +174,7 @@
       </p:grpSpPr>
       <p:sp>
         <p:nvSpPr>
-          <p:cNvPr id="2" name="标题 1">
-            <a:extLst>
-              <a:ext uri="{FF2B5EF4-FFF2-40B4-BE49-F238E27FC236}">
-                <a16:creationId xmlns:a16="http://schemas.microsoft.com/office/drawing/2014/main" id="{138894C6-4BE5-4CDB-C326-D6F41A5D121E}"/>
-              </a:ext>
-            </a:extLst>
-          </p:cNvPr>
+          <p:cNvPr id="2" name="Title 1"/>
           <p:cNvSpPr>
             <a:spLocks noGrp="1"/>
           </p:cNvSpPr>
@@ -189,15 +184,15 @@
         </p:nvSpPr>
         <p:spPr>
           <a:xfrm>
-            <a:off x="1524000" y="1122363"/>
-            <a:ext cx="9144000" cy="2387600"/>
+            <a:off x="458986" y="647957"/>
+            <a:ext cx="5201841" cy="1378397"/>
           </a:xfrm>
         </p:spPr>
         <p:txBody>
           <a:bodyPr anchor="b"/>
           <a:lstStyle>
             <a:lvl1pPr algn="ctr">
-              <a:defRPr sz="6000"/>
+              <a:defRPr sz="3464"/>
             </a:lvl1pPr>
           </a:lstStyle>
           <a:p>
@@ -205,18 +200,13 @@
               <a:rPr lang="zh-CN" altLang="en-US"/>
               <a:t>单击此处编辑母版标题样式</a:t>
             </a:r>
-          </a:p>
-        </p:txBody>
-      </p:sp>
-      <p:sp>
-        <p:nvSpPr>
-          <p:cNvPr id="3" name="副标题 2">
-            <a:extLst>
-              <a:ext uri="{FF2B5EF4-FFF2-40B4-BE49-F238E27FC236}">
-                <a16:creationId xmlns:a16="http://schemas.microsoft.com/office/drawing/2014/main" id="{FB0A4763-BE4B-55FA-A42D-DF028D0D951E}"/>
-              </a:ext>
-            </a:extLst>
-          </p:cNvPr>
+            <a:endParaRPr lang="en-US" dirty="0"/>
+          </a:p>
+        </p:txBody>
+      </p:sp>
+      <p:sp>
+        <p:nvSpPr>
+          <p:cNvPr id="3" name="Subtitle 2"/>
           <p:cNvSpPr>
             <a:spLocks noGrp="1"/>
           </p:cNvSpPr>
@@ -226,8 +216,8 @@
         </p:nvSpPr>
         <p:spPr>
           <a:xfrm>
-            <a:off x="1524000" y="3602038"/>
-            <a:ext cx="9144000" cy="1655762"/>
+            <a:off x="764977" y="2079510"/>
+            <a:ext cx="4589860" cy="955896"/>
           </a:xfrm>
         </p:spPr>
         <p:txBody>
@@ -235,39 +225,39 @@
           <a:lstStyle>
             <a:lvl1pPr marL="0" indent="0" algn="ctr">
               <a:buNone/>
-              <a:defRPr sz="2400"/>
+              <a:defRPr sz="1386"/>
             </a:lvl1pPr>
-            <a:lvl2pPr marL="457200" indent="0" algn="ctr">
-              <a:buNone/>
-              <a:defRPr sz="2000"/>
+            <a:lvl2pPr marL="263942" indent="0" algn="ctr">
+              <a:buNone/>
+              <a:defRPr sz="1155"/>
             </a:lvl2pPr>
-            <a:lvl3pPr marL="914400" indent="0" algn="ctr">
-              <a:buNone/>
-              <a:defRPr sz="1800"/>
+            <a:lvl3pPr marL="527883" indent="0" algn="ctr">
+              <a:buNone/>
+              <a:defRPr sz="1039"/>
             </a:lvl3pPr>
-            <a:lvl4pPr marL="1371600" indent="0" algn="ctr">
-              <a:buNone/>
-              <a:defRPr sz="1600"/>
+            <a:lvl4pPr marL="791825" indent="0" algn="ctr">
+              <a:buNone/>
+              <a:defRPr sz="924"/>
             </a:lvl4pPr>
-            <a:lvl5pPr marL="1828800" indent="0" algn="ctr">
-              <a:buNone/>
-              <a:defRPr sz="1600"/>
+            <a:lvl5pPr marL="1055766" indent="0" algn="ctr">
+              <a:buNone/>
+              <a:defRPr sz="924"/>
             </a:lvl5pPr>
-            <a:lvl6pPr marL="2286000" indent="0" algn="ctr">
-              <a:buNone/>
-              <a:defRPr sz="1600"/>
+            <a:lvl6pPr marL="1319708" indent="0" algn="ctr">
+              <a:buNone/>
+              <a:defRPr sz="924"/>
             </a:lvl6pPr>
-            <a:lvl7pPr marL="2743200" indent="0" algn="ctr">
-              <a:buNone/>
-              <a:defRPr sz="1600"/>
+            <a:lvl7pPr marL="1583649" indent="0" algn="ctr">
+              <a:buNone/>
+              <a:defRPr sz="924"/>
             </a:lvl7pPr>
-            <a:lvl8pPr marL="3200400" indent="0" algn="ctr">
-              <a:buNone/>
-              <a:defRPr sz="1600"/>
+            <a:lvl8pPr marL="1847591" indent="0" algn="ctr">
+              <a:buNone/>
+              <a:defRPr sz="924"/>
             </a:lvl8pPr>
-            <a:lvl9pPr marL="3657600" indent="0" algn="ctr">
-              <a:buNone/>
-              <a:defRPr sz="1600"/>
+            <a:lvl9pPr marL="2111532" indent="0" algn="ctr">
+              <a:buNone/>
+              <a:defRPr sz="924"/>
             </a:lvl9pPr>
           </a:lstStyle>
           <a:p>
@@ -275,18 +265,13 @@
               <a:rPr lang="zh-CN" altLang="en-US"/>
               <a:t>单击此处编辑母版副标题样式</a:t>
             </a:r>
-          </a:p>
-        </p:txBody>
-      </p:sp>
-      <p:sp>
-        <p:nvSpPr>
-          <p:cNvPr id="4" name="日期占位符 3">
-            <a:extLst>
-              <a:ext uri="{FF2B5EF4-FFF2-40B4-BE49-F238E27FC236}">
-                <a16:creationId xmlns:a16="http://schemas.microsoft.com/office/drawing/2014/main" id="{EBF822D9-79E5-841B-438A-7A976FA3B8BA}"/>
-              </a:ext>
-            </a:extLst>
-          </p:cNvPr>
+            <a:endParaRPr lang="en-US" dirty="0"/>
+          </a:p>
+        </p:txBody>
+      </p:sp>
+      <p:sp>
+        <p:nvSpPr>
+          <p:cNvPr id="4" name="Date Placeholder 3"/>
           <p:cNvSpPr>
             <a:spLocks noGrp="1"/>
           </p:cNvSpPr>
@@ -301,7 +286,7 @@
           <a:p>
             <a:fld id="{0D913D72-DA84-4294-82A6-28AD38AC8E6C}" type="datetimeFigureOut">
               <a:rPr lang="zh-CN" altLang="en-US" smtClean="0"/>
-              <a:t>2026/3/17</a:t>
+              <a:t>2026/3/25</a:t>
             </a:fld>
             <a:endParaRPr lang="zh-CN" altLang="en-US"/>
           </a:p>
@@ -309,13 +294,7 @@
       </p:sp>
       <p:sp>
         <p:nvSpPr>
-          <p:cNvPr id="5" name="页脚占位符 4">
-            <a:extLst>
-              <a:ext uri="{FF2B5EF4-FFF2-40B4-BE49-F238E27FC236}">
-                <a16:creationId xmlns:a16="http://schemas.microsoft.com/office/drawing/2014/main" id="{7AE22C94-E9F2-3755-72CF-F7B873843914}"/>
-              </a:ext>
-            </a:extLst>
-          </p:cNvPr>
+          <p:cNvPr id="5" name="Footer Placeholder 4"/>
           <p:cNvSpPr>
             <a:spLocks noGrp="1"/>
           </p:cNvSpPr>
@@ -334,13 +313,7 @@
       </p:sp>
       <p:sp>
         <p:nvSpPr>
-          <p:cNvPr id="6" name="灯片编号占位符 5">
-            <a:extLst>
-              <a:ext uri="{FF2B5EF4-FFF2-40B4-BE49-F238E27FC236}">
-                <a16:creationId xmlns:a16="http://schemas.microsoft.com/office/drawing/2014/main" id="{E6359043-903B-B449-4136-50EC9EEB3450}"/>
-              </a:ext>
-            </a:extLst>
-          </p:cNvPr>
+          <p:cNvPr id="6" name="Slide Number Placeholder 5"/>
           <p:cNvSpPr>
             <a:spLocks noGrp="1"/>
           </p:cNvSpPr>
@@ -364,7 +337,7 @@
     </p:spTree>
     <p:extLst>
       <p:ext uri="{BB962C8B-B14F-4D97-AF65-F5344CB8AC3E}">
-        <p14:creationId xmlns:p14="http://schemas.microsoft.com/office/powerpoint/2010/main" val="4123984897"/>
+        <p14:creationId xmlns:p14="http://schemas.microsoft.com/office/powerpoint/2010/main" val="3143946565"/>
       </p:ext>
     </p:extLst>
   </p:cSld>
@@ -393,13 +366,7 @@
       </p:grpSpPr>
       <p:sp>
         <p:nvSpPr>
-          <p:cNvPr id="2" name="标题 1">
-            <a:extLst>
-              <a:ext uri="{FF2B5EF4-FFF2-40B4-BE49-F238E27FC236}">
-                <a16:creationId xmlns:a16="http://schemas.microsoft.com/office/drawing/2014/main" id="{F9354C20-CAE9-9103-6B56-C4313A386A85}"/>
-              </a:ext>
-            </a:extLst>
-          </p:cNvPr>
+          <p:cNvPr id="2" name="Title 1"/>
           <p:cNvSpPr>
             <a:spLocks noGrp="1"/>
           </p:cNvSpPr>
@@ -416,18 +383,13 @@
               <a:rPr lang="zh-CN" altLang="en-US"/>
               <a:t>单击此处编辑母版标题样式</a:t>
             </a:r>
-          </a:p>
-        </p:txBody>
-      </p:sp>
-      <p:sp>
-        <p:nvSpPr>
-          <p:cNvPr id="3" name="竖排文字占位符 2">
-            <a:extLst>
-              <a:ext uri="{FF2B5EF4-FFF2-40B4-BE49-F238E27FC236}">
-                <a16:creationId xmlns:a16="http://schemas.microsoft.com/office/drawing/2014/main" id="{DE62096C-1303-FE5A-62A9-3BF8D98303AA}"/>
-              </a:ext>
-            </a:extLst>
-          </p:cNvPr>
+            <a:endParaRPr lang="en-US" dirty="0"/>
+          </a:p>
+        </p:txBody>
+      </p:sp>
+      <p:sp>
+        <p:nvSpPr>
+          <p:cNvPr id="3" name="Vertical Text Placeholder 2"/>
           <p:cNvSpPr>
             <a:spLocks noGrp="1"/>
           </p:cNvSpPr>
@@ -473,18 +435,13 @@
               <a:rPr lang="zh-CN" altLang="en-US"/>
               <a:t>五级</a:t>
             </a:r>
-          </a:p>
-        </p:txBody>
-      </p:sp>
-      <p:sp>
-        <p:nvSpPr>
-          <p:cNvPr id="4" name="日期占位符 3">
-            <a:extLst>
-              <a:ext uri="{FF2B5EF4-FFF2-40B4-BE49-F238E27FC236}">
-                <a16:creationId xmlns:a16="http://schemas.microsoft.com/office/drawing/2014/main" id="{D1196774-ADE9-3210-7935-A74C90BB26F4}"/>
-              </a:ext>
-            </a:extLst>
-          </p:cNvPr>
+            <a:endParaRPr lang="en-US" dirty="0"/>
+          </a:p>
+        </p:txBody>
+      </p:sp>
+      <p:sp>
+        <p:nvSpPr>
+          <p:cNvPr id="4" name="Date Placeholder 3"/>
           <p:cNvSpPr>
             <a:spLocks noGrp="1"/>
           </p:cNvSpPr>
@@ -499,7 +456,7 @@
           <a:p>
             <a:fld id="{0D913D72-DA84-4294-82A6-28AD38AC8E6C}" type="datetimeFigureOut">
               <a:rPr lang="zh-CN" altLang="en-US" smtClean="0"/>
-              <a:t>2026/3/17</a:t>
+              <a:t>2026/3/25</a:t>
             </a:fld>
             <a:endParaRPr lang="zh-CN" altLang="en-US"/>
           </a:p>
@@ -507,13 +464,7 @@
       </p:sp>
       <p:sp>
         <p:nvSpPr>
-          <p:cNvPr id="5" name="页脚占位符 4">
-            <a:extLst>
-              <a:ext uri="{FF2B5EF4-FFF2-40B4-BE49-F238E27FC236}">
-                <a16:creationId xmlns:a16="http://schemas.microsoft.com/office/drawing/2014/main" id="{0B572070-4D16-0813-1342-5A0E8DA63F2F}"/>
-              </a:ext>
-            </a:extLst>
-          </p:cNvPr>
+          <p:cNvPr id="5" name="Footer Placeholder 4"/>
           <p:cNvSpPr>
             <a:spLocks noGrp="1"/>
           </p:cNvSpPr>
@@ -532,13 +483,7 @@
       </p:sp>
       <p:sp>
         <p:nvSpPr>
-          <p:cNvPr id="6" name="灯片编号占位符 5">
-            <a:extLst>
-              <a:ext uri="{FF2B5EF4-FFF2-40B4-BE49-F238E27FC236}">
-                <a16:creationId xmlns:a16="http://schemas.microsoft.com/office/drawing/2014/main" id="{5F77D7AF-3E12-E6DE-59BF-10A101CA6266}"/>
-              </a:ext>
-            </a:extLst>
-          </p:cNvPr>
+          <p:cNvPr id="6" name="Slide Number Placeholder 5"/>
           <p:cNvSpPr>
             <a:spLocks noGrp="1"/>
           </p:cNvSpPr>
@@ -562,7 +507,7 @@
     </p:spTree>
     <p:extLst>
       <p:ext uri="{BB962C8B-B14F-4D97-AF65-F5344CB8AC3E}">
-        <p14:creationId xmlns:p14="http://schemas.microsoft.com/office/powerpoint/2010/main" val="182203718"/>
+        <p14:creationId xmlns:p14="http://schemas.microsoft.com/office/powerpoint/2010/main" val="430654888"/>
       </p:ext>
     </p:extLst>
   </p:cSld>
@@ -591,13 +536,7 @@
       </p:grpSpPr>
       <p:sp>
         <p:nvSpPr>
-          <p:cNvPr id="2" name="竖排标题 1">
-            <a:extLst>
-              <a:ext uri="{FF2B5EF4-FFF2-40B4-BE49-F238E27FC236}">
-                <a16:creationId xmlns:a16="http://schemas.microsoft.com/office/drawing/2014/main" id="{E19A086B-6925-1237-FAD9-35D72BA0F2AA}"/>
-              </a:ext>
-            </a:extLst>
-          </p:cNvPr>
+          <p:cNvPr id="2" name="Vertical Title 1"/>
           <p:cNvSpPr>
             <a:spLocks noGrp="1"/>
           </p:cNvSpPr>
@@ -607,8 +546,8 @@
         </p:nvSpPr>
         <p:spPr>
           <a:xfrm>
-            <a:off x="8724900" y="365125"/>
-            <a:ext cx="2628900" cy="5811838"/>
+            <a:off x="4379491" y="210792"/>
+            <a:ext cx="1319585" cy="3355260"/>
           </a:xfrm>
         </p:spPr>
         <p:txBody>
@@ -619,18 +558,13 @@
               <a:rPr lang="zh-CN" altLang="en-US"/>
               <a:t>单击此处编辑母版标题样式</a:t>
             </a:r>
-          </a:p>
-        </p:txBody>
-      </p:sp>
-      <p:sp>
-        <p:nvSpPr>
-          <p:cNvPr id="3" name="竖排文字占位符 2">
-            <a:extLst>
-              <a:ext uri="{FF2B5EF4-FFF2-40B4-BE49-F238E27FC236}">
-                <a16:creationId xmlns:a16="http://schemas.microsoft.com/office/drawing/2014/main" id="{458AF39B-100F-67B9-42B6-F5B497D7DBD5}"/>
-              </a:ext>
-            </a:extLst>
-          </p:cNvPr>
+            <a:endParaRPr lang="en-US" dirty="0"/>
+          </a:p>
+        </p:txBody>
+      </p:sp>
+      <p:sp>
+        <p:nvSpPr>
+          <p:cNvPr id="3" name="Vertical Text Placeholder 2"/>
           <p:cNvSpPr>
             <a:spLocks noGrp="1"/>
           </p:cNvSpPr>
@@ -640,8 +574,8 @@
         </p:nvSpPr>
         <p:spPr>
           <a:xfrm>
-            <a:off x="838200" y="365125"/>
-            <a:ext cx="7734300" cy="5811838"/>
+            <a:off x="420738" y="210792"/>
+            <a:ext cx="3882256" cy="3355260"/>
           </a:xfrm>
         </p:spPr>
         <p:txBody>
@@ -681,18 +615,13 @@
               <a:rPr lang="zh-CN" altLang="en-US"/>
               <a:t>五级</a:t>
             </a:r>
-          </a:p>
-        </p:txBody>
-      </p:sp>
-      <p:sp>
-        <p:nvSpPr>
-          <p:cNvPr id="4" name="日期占位符 3">
-            <a:extLst>
-              <a:ext uri="{FF2B5EF4-FFF2-40B4-BE49-F238E27FC236}">
-                <a16:creationId xmlns:a16="http://schemas.microsoft.com/office/drawing/2014/main" id="{782D1E3E-54B1-B5A3-3B80-CED4710ECA24}"/>
-              </a:ext>
-            </a:extLst>
-          </p:cNvPr>
+            <a:endParaRPr lang="en-US" dirty="0"/>
+          </a:p>
+        </p:txBody>
+      </p:sp>
+      <p:sp>
+        <p:nvSpPr>
+          <p:cNvPr id="4" name="Date Placeholder 3"/>
           <p:cNvSpPr>
             <a:spLocks noGrp="1"/>
           </p:cNvSpPr>
@@ -707,7 +636,7 @@
           <a:p>
             <a:fld id="{0D913D72-DA84-4294-82A6-28AD38AC8E6C}" type="datetimeFigureOut">
               <a:rPr lang="zh-CN" altLang="en-US" smtClean="0"/>
-              <a:t>2026/3/17</a:t>
+              <a:t>2026/3/25</a:t>
             </a:fld>
             <a:endParaRPr lang="zh-CN" altLang="en-US"/>
           </a:p>
@@ -715,13 +644,7 @@
       </p:sp>
       <p:sp>
         <p:nvSpPr>
-          <p:cNvPr id="5" name="页脚占位符 4">
-            <a:extLst>
-              <a:ext uri="{FF2B5EF4-FFF2-40B4-BE49-F238E27FC236}">
-                <a16:creationId xmlns:a16="http://schemas.microsoft.com/office/drawing/2014/main" id="{13E4B5D0-104F-9BC5-8DFB-F3990DE009CC}"/>
-              </a:ext>
-            </a:extLst>
-          </p:cNvPr>
+          <p:cNvPr id="5" name="Footer Placeholder 4"/>
           <p:cNvSpPr>
             <a:spLocks noGrp="1"/>
           </p:cNvSpPr>
@@ -740,13 +663,7 @@
       </p:sp>
       <p:sp>
         <p:nvSpPr>
-          <p:cNvPr id="6" name="灯片编号占位符 5">
-            <a:extLst>
-              <a:ext uri="{FF2B5EF4-FFF2-40B4-BE49-F238E27FC236}">
-                <a16:creationId xmlns:a16="http://schemas.microsoft.com/office/drawing/2014/main" id="{052FE84E-0FD4-AE55-7030-0E666690BB7B}"/>
-              </a:ext>
-            </a:extLst>
-          </p:cNvPr>
+          <p:cNvPr id="6" name="Slide Number Placeholder 5"/>
           <p:cNvSpPr>
             <a:spLocks noGrp="1"/>
           </p:cNvSpPr>
@@ -770,7 +687,7 @@
     </p:spTree>
     <p:extLst>
       <p:ext uri="{BB962C8B-B14F-4D97-AF65-F5344CB8AC3E}">
-        <p14:creationId xmlns:p14="http://schemas.microsoft.com/office/powerpoint/2010/main" val="1076304692"/>
+        <p14:creationId xmlns:p14="http://schemas.microsoft.com/office/powerpoint/2010/main" val="1995554040"/>
       </p:ext>
     </p:extLst>
   </p:cSld>
@@ -799,13 +716,7 @@
       </p:grpSpPr>
       <p:sp>
         <p:nvSpPr>
-          <p:cNvPr id="2" name="标题 1">
-            <a:extLst>
-              <a:ext uri="{FF2B5EF4-FFF2-40B4-BE49-F238E27FC236}">
-                <a16:creationId xmlns:a16="http://schemas.microsoft.com/office/drawing/2014/main" id="{DF570ABA-6464-FE01-9BF1-51815CA9335D}"/>
-              </a:ext>
-            </a:extLst>
-          </p:cNvPr>
+          <p:cNvPr id="2" name="Title 1"/>
           <p:cNvSpPr>
             <a:spLocks noGrp="1"/>
           </p:cNvSpPr>
@@ -822,18 +733,13 @@
               <a:rPr lang="zh-CN" altLang="en-US"/>
               <a:t>单击此处编辑母版标题样式</a:t>
             </a:r>
-          </a:p>
-        </p:txBody>
-      </p:sp>
-      <p:sp>
-        <p:nvSpPr>
-          <p:cNvPr id="3" name="内容占位符 2">
-            <a:extLst>
-              <a:ext uri="{FF2B5EF4-FFF2-40B4-BE49-F238E27FC236}">
-                <a16:creationId xmlns:a16="http://schemas.microsoft.com/office/drawing/2014/main" id="{A7C6836A-6AEB-FBEC-08E1-F20D6FCB9798}"/>
-              </a:ext>
-            </a:extLst>
-          </p:cNvPr>
+            <a:endParaRPr lang="en-US" dirty="0"/>
+          </a:p>
+        </p:txBody>
+      </p:sp>
+      <p:sp>
+        <p:nvSpPr>
+          <p:cNvPr id="3" name="Content Placeholder 2"/>
           <p:cNvSpPr>
             <a:spLocks noGrp="1"/>
           </p:cNvSpPr>
@@ -879,18 +785,13 @@
               <a:rPr lang="zh-CN" altLang="en-US"/>
               <a:t>五级</a:t>
             </a:r>
-          </a:p>
-        </p:txBody>
-      </p:sp>
-      <p:sp>
-        <p:nvSpPr>
-          <p:cNvPr id="4" name="日期占位符 3">
-            <a:extLst>
-              <a:ext uri="{FF2B5EF4-FFF2-40B4-BE49-F238E27FC236}">
-                <a16:creationId xmlns:a16="http://schemas.microsoft.com/office/drawing/2014/main" id="{64E70549-1116-6DFB-F765-EE5B00E8F188}"/>
-              </a:ext>
-            </a:extLst>
-          </p:cNvPr>
+            <a:endParaRPr lang="en-US" dirty="0"/>
+          </a:p>
+        </p:txBody>
+      </p:sp>
+      <p:sp>
+        <p:nvSpPr>
+          <p:cNvPr id="4" name="Date Placeholder 3"/>
           <p:cNvSpPr>
             <a:spLocks noGrp="1"/>
           </p:cNvSpPr>
@@ -905,7 +806,7 @@
           <a:p>
             <a:fld id="{0D913D72-DA84-4294-82A6-28AD38AC8E6C}" type="datetimeFigureOut">
               <a:rPr lang="zh-CN" altLang="en-US" smtClean="0"/>
-              <a:t>2026/3/17</a:t>
+              <a:t>2026/3/25</a:t>
             </a:fld>
             <a:endParaRPr lang="zh-CN" altLang="en-US"/>
           </a:p>
@@ -913,13 +814,7 @@
       </p:sp>
       <p:sp>
         <p:nvSpPr>
-          <p:cNvPr id="5" name="页脚占位符 4">
-            <a:extLst>
-              <a:ext uri="{FF2B5EF4-FFF2-40B4-BE49-F238E27FC236}">
-                <a16:creationId xmlns:a16="http://schemas.microsoft.com/office/drawing/2014/main" id="{97EAB106-772F-7B42-4B59-4D991AE639AE}"/>
-              </a:ext>
-            </a:extLst>
-          </p:cNvPr>
+          <p:cNvPr id="5" name="Footer Placeholder 4"/>
           <p:cNvSpPr>
             <a:spLocks noGrp="1"/>
           </p:cNvSpPr>
@@ -938,13 +833,7 @@
       </p:sp>
       <p:sp>
         <p:nvSpPr>
-          <p:cNvPr id="6" name="灯片编号占位符 5">
-            <a:extLst>
-              <a:ext uri="{FF2B5EF4-FFF2-40B4-BE49-F238E27FC236}">
-                <a16:creationId xmlns:a16="http://schemas.microsoft.com/office/drawing/2014/main" id="{DE7CB8B5-1734-C7A1-F940-93D7B170B68D}"/>
-              </a:ext>
-            </a:extLst>
-          </p:cNvPr>
+          <p:cNvPr id="6" name="Slide Number Placeholder 5"/>
           <p:cNvSpPr>
             <a:spLocks noGrp="1"/>
           </p:cNvSpPr>
@@ -968,7 +857,7 @@
     </p:spTree>
     <p:extLst>
       <p:ext uri="{BB962C8B-B14F-4D97-AF65-F5344CB8AC3E}">
-        <p14:creationId xmlns:p14="http://schemas.microsoft.com/office/powerpoint/2010/main" val="4290181454"/>
+        <p14:creationId xmlns:p14="http://schemas.microsoft.com/office/powerpoint/2010/main" val="1084480132"/>
       </p:ext>
     </p:extLst>
   </p:cSld>
@@ -997,13 +886,7 @@
       </p:grpSpPr>
       <p:sp>
         <p:nvSpPr>
-          <p:cNvPr id="2" name="标题 1">
-            <a:extLst>
-              <a:ext uri="{FF2B5EF4-FFF2-40B4-BE49-F238E27FC236}">
-                <a16:creationId xmlns:a16="http://schemas.microsoft.com/office/drawing/2014/main" id="{1BA57CA4-A742-6EA8-F01A-0807B9CC65BA}"/>
-              </a:ext>
-            </a:extLst>
-          </p:cNvPr>
+          <p:cNvPr id="2" name="Title 1"/>
           <p:cNvSpPr>
             <a:spLocks noGrp="1"/>
           </p:cNvSpPr>
@@ -1013,15 +896,15 @@
         </p:nvSpPr>
         <p:spPr>
           <a:xfrm>
-            <a:off x="831850" y="1709738"/>
-            <a:ext cx="10515600" cy="2852737"/>
+            <a:off x="417550" y="987058"/>
+            <a:ext cx="5278339" cy="1646927"/>
           </a:xfrm>
         </p:spPr>
         <p:txBody>
           <a:bodyPr anchor="b"/>
           <a:lstStyle>
             <a:lvl1pPr>
-              <a:defRPr sz="6000"/>
+              <a:defRPr sz="3464"/>
             </a:lvl1pPr>
           </a:lstStyle>
           <a:p>
@@ -1029,18 +912,13 @@
               <a:rPr lang="zh-CN" altLang="en-US"/>
               <a:t>单击此处编辑母版标题样式</a:t>
             </a:r>
-          </a:p>
-        </p:txBody>
-      </p:sp>
-      <p:sp>
-        <p:nvSpPr>
-          <p:cNvPr id="3" name="文本占位符 2">
-            <a:extLst>
-              <a:ext uri="{FF2B5EF4-FFF2-40B4-BE49-F238E27FC236}">
-                <a16:creationId xmlns:a16="http://schemas.microsoft.com/office/drawing/2014/main" id="{386D1255-E191-143C-F775-AB2061B16BE0}"/>
-              </a:ext>
-            </a:extLst>
-          </p:cNvPr>
+            <a:endParaRPr lang="en-US" dirty="0"/>
+          </a:p>
+        </p:txBody>
+      </p:sp>
+      <p:sp>
+        <p:nvSpPr>
+          <p:cNvPr id="3" name="Text Placeholder 2"/>
           <p:cNvSpPr>
             <a:spLocks noGrp="1"/>
           </p:cNvSpPr>
@@ -1050,8 +928,8 @@
         </p:nvSpPr>
         <p:spPr>
           <a:xfrm>
-            <a:off x="831850" y="4589463"/>
-            <a:ext cx="10515600" cy="1500187"/>
+            <a:off x="417550" y="2649566"/>
+            <a:ext cx="5278339" cy="866080"/>
           </a:xfrm>
         </p:spPr>
         <p:txBody>
@@ -1059,17 +937,15 @@
           <a:lstStyle>
             <a:lvl1pPr marL="0" indent="0">
               <a:buNone/>
-              <a:defRPr sz="2400">
+              <a:defRPr sz="1386">
                 <a:solidFill>
-                  <a:schemeClr val="tx1">
-                    <a:tint val="75000"/>
-                  </a:schemeClr>
+                  <a:schemeClr val="tx1"/>
                 </a:solidFill>
               </a:defRPr>
             </a:lvl1pPr>
-            <a:lvl2pPr marL="457200" indent="0">
-              <a:buNone/>
-              <a:defRPr sz="2000">
+            <a:lvl2pPr marL="263942" indent="0">
+              <a:buNone/>
+              <a:defRPr sz="1155">
                 <a:solidFill>
                   <a:schemeClr val="tx1">
                     <a:tint val="75000"/>
@@ -1077,9 +953,9 @@
                 </a:solidFill>
               </a:defRPr>
             </a:lvl2pPr>
-            <a:lvl3pPr marL="914400" indent="0">
-              <a:buNone/>
-              <a:defRPr sz="1800">
+            <a:lvl3pPr marL="527883" indent="0">
+              <a:buNone/>
+              <a:defRPr sz="1039">
                 <a:solidFill>
                   <a:schemeClr val="tx1">
                     <a:tint val="75000"/>
@@ -1087,9 +963,9 @@
                 </a:solidFill>
               </a:defRPr>
             </a:lvl3pPr>
-            <a:lvl4pPr marL="1371600" indent="0">
-              <a:buNone/>
-              <a:defRPr sz="1600">
+            <a:lvl4pPr marL="791825" indent="0">
+              <a:buNone/>
+              <a:defRPr sz="924">
                 <a:solidFill>
                   <a:schemeClr val="tx1">
                     <a:tint val="75000"/>
@@ -1097,9 +973,9 @@
                 </a:solidFill>
               </a:defRPr>
             </a:lvl4pPr>
-            <a:lvl5pPr marL="1828800" indent="0">
-              <a:buNone/>
-              <a:defRPr sz="1600">
+            <a:lvl5pPr marL="1055766" indent="0">
+              <a:buNone/>
+              <a:defRPr sz="924">
                 <a:solidFill>
                   <a:schemeClr val="tx1">
                     <a:tint val="75000"/>
@@ -1107,9 +983,9 @@
                 </a:solidFill>
               </a:defRPr>
             </a:lvl5pPr>
-            <a:lvl6pPr marL="2286000" indent="0">
-              <a:buNone/>
-              <a:defRPr sz="1600">
+            <a:lvl6pPr marL="1319708" indent="0">
+              <a:buNone/>
+              <a:defRPr sz="924">
                 <a:solidFill>
                   <a:schemeClr val="tx1">
                     <a:tint val="75000"/>
@@ -1117,9 +993,9 @@
                 </a:solidFill>
               </a:defRPr>
             </a:lvl6pPr>
-            <a:lvl7pPr marL="2743200" indent="0">
-              <a:buNone/>
-              <a:defRPr sz="1600">
+            <a:lvl7pPr marL="1583649" indent="0">
+              <a:buNone/>
+              <a:defRPr sz="924">
                 <a:solidFill>
                   <a:schemeClr val="tx1">
                     <a:tint val="75000"/>
@@ -1127,9 +1003,9 @@
                 </a:solidFill>
               </a:defRPr>
             </a:lvl7pPr>
-            <a:lvl8pPr marL="3200400" indent="0">
-              <a:buNone/>
-              <a:defRPr sz="1600">
+            <a:lvl8pPr marL="1847591" indent="0">
+              <a:buNone/>
+              <a:defRPr sz="924">
                 <a:solidFill>
                   <a:schemeClr val="tx1">
                     <a:tint val="75000"/>
@@ -1137,9 +1013,9 @@
                 </a:solidFill>
               </a:defRPr>
             </a:lvl8pPr>
-            <a:lvl9pPr marL="3657600" indent="0">
-              <a:buNone/>
-              <a:defRPr sz="1600">
+            <a:lvl9pPr marL="2111532" indent="0">
+              <a:buNone/>
+              <a:defRPr sz="924">
                 <a:solidFill>
                   <a:schemeClr val="tx1">
                     <a:tint val="75000"/>
@@ -1159,13 +1035,7 @@
       </p:sp>
       <p:sp>
         <p:nvSpPr>
-          <p:cNvPr id="4" name="日期占位符 3">
-            <a:extLst>
-              <a:ext uri="{FF2B5EF4-FFF2-40B4-BE49-F238E27FC236}">
-                <a16:creationId xmlns:a16="http://schemas.microsoft.com/office/drawing/2014/main" id="{F796204D-B0EC-8FE0-FB7C-68EF148BF084}"/>
-              </a:ext>
-            </a:extLst>
-          </p:cNvPr>
+          <p:cNvPr id="4" name="Date Placeholder 3"/>
           <p:cNvSpPr>
             <a:spLocks noGrp="1"/>
           </p:cNvSpPr>
@@ -1180,7 +1050,7 @@
           <a:p>
             <a:fld id="{0D913D72-DA84-4294-82A6-28AD38AC8E6C}" type="datetimeFigureOut">
               <a:rPr lang="zh-CN" altLang="en-US" smtClean="0"/>
-              <a:t>2026/3/17</a:t>
+              <a:t>2026/3/25</a:t>
             </a:fld>
             <a:endParaRPr lang="zh-CN" altLang="en-US"/>
           </a:p>
@@ -1188,13 +1058,7 @@
       </p:sp>
       <p:sp>
         <p:nvSpPr>
-          <p:cNvPr id="5" name="页脚占位符 4">
-            <a:extLst>
-              <a:ext uri="{FF2B5EF4-FFF2-40B4-BE49-F238E27FC236}">
-                <a16:creationId xmlns:a16="http://schemas.microsoft.com/office/drawing/2014/main" id="{733444DF-66AC-FC31-AD24-CE664681330F}"/>
-              </a:ext>
-            </a:extLst>
-          </p:cNvPr>
+          <p:cNvPr id="5" name="Footer Placeholder 4"/>
           <p:cNvSpPr>
             <a:spLocks noGrp="1"/>
           </p:cNvSpPr>
@@ -1213,13 +1077,7 @@
       </p:sp>
       <p:sp>
         <p:nvSpPr>
-          <p:cNvPr id="6" name="灯片编号占位符 5">
-            <a:extLst>
-              <a:ext uri="{FF2B5EF4-FFF2-40B4-BE49-F238E27FC236}">
-                <a16:creationId xmlns:a16="http://schemas.microsoft.com/office/drawing/2014/main" id="{FBA1B8DC-ADF4-394B-671F-108E1DF8BB4D}"/>
-              </a:ext>
-            </a:extLst>
-          </p:cNvPr>
+          <p:cNvPr id="6" name="Slide Number Placeholder 5"/>
           <p:cNvSpPr>
             <a:spLocks noGrp="1"/>
           </p:cNvSpPr>
@@ -1243,7 +1101,7 @@
     </p:spTree>
     <p:extLst>
       <p:ext uri="{BB962C8B-B14F-4D97-AF65-F5344CB8AC3E}">
-        <p14:creationId xmlns:p14="http://schemas.microsoft.com/office/powerpoint/2010/main" val="1701864800"/>
+        <p14:creationId xmlns:p14="http://schemas.microsoft.com/office/powerpoint/2010/main" val="4188213281"/>
       </p:ext>
     </p:extLst>
   </p:cSld>
@@ -1272,13 +1130,7 @@
       </p:grpSpPr>
       <p:sp>
         <p:nvSpPr>
-          <p:cNvPr id="2" name="标题 1">
-            <a:extLst>
-              <a:ext uri="{FF2B5EF4-FFF2-40B4-BE49-F238E27FC236}">
-                <a16:creationId xmlns:a16="http://schemas.microsoft.com/office/drawing/2014/main" id="{F1794E94-63CD-38C2-7248-EE47F636EF9C}"/>
-              </a:ext>
-            </a:extLst>
-          </p:cNvPr>
+          <p:cNvPr id="2" name="Title 1"/>
           <p:cNvSpPr>
             <a:spLocks noGrp="1"/>
           </p:cNvSpPr>
@@ -1295,18 +1147,13 @@
               <a:rPr lang="zh-CN" altLang="en-US"/>
               <a:t>单击此处编辑母版标题样式</a:t>
             </a:r>
-          </a:p>
-        </p:txBody>
-      </p:sp>
-      <p:sp>
-        <p:nvSpPr>
-          <p:cNvPr id="3" name="内容占位符 2">
-            <a:extLst>
-              <a:ext uri="{FF2B5EF4-FFF2-40B4-BE49-F238E27FC236}">
-                <a16:creationId xmlns:a16="http://schemas.microsoft.com/office/drawing/2014/main" id="{E6B2AD80-B68C-AE17-4B53-59C26B776F94}"/>
-              </a:ext>
-            </a:extLst>
-          </p:cNvPr>
+            <a:endParaRPr lang="en-US" dirty="0"/>
+          </a:p>
+        </p:txBody>
+      </p:sp>
+      <p:sp>
+        <p:nvSpPr>
+          <p:cNvPr id="3" name="Content Placeholder 2"/>
           <p:cNvSpPr>
             <a:spLocks noGrp="1"/>
           </p:cNvSpPr>
@@ -1316,8 +1163,8 @@
         </p:nvSpPr>
         <p:spPr>
           <a:xfrm>
-            <a:off x="838200" y="1825625"/>
-            <a:ext cx="5181600" cy="4351338"/>
+            <a:off x="420737" y="1053960"/>
+            <a:ext cx="2600921" cy="2512092"/>
           </a:xfrm>
         </p:spPr>
         <p:txBody>
@@ -1357,18 +1204,13 @@
               <a:rPr lang="zh-CN" altLang="en-US"/>
               <a:t>五级</a:t>
             </a:r>
-          </a:p>
-        </p:txBody>
-      </p:sp>
-      <p:sp>
-        <p:nvSpPr>
-          <p:cNvPr id="4" name="内容占位符 3">
-            <a:extLst>
-              <a:ext uri="{FF2B5EF4-FFF2-40B4-BE49-F238E27FC236}">
-                <a16:creationId xmlns:a16="http://schemas.microsoft.com/office/drawing/2014/main" id="{7F02A9C1-38EA-38F1-3A50-B7353061FEE4}"/>
-              </a:ext>
-            </a:extLst>
-          </p:cNvPr>
+            <a:endParaRPr lang="en-US" dirty="0"/>
+          </a:p>
+        </p:txBody>
+      </p:sp>
+      <p:sp>
+        <p:nvSpPr>
+          <p:cNvPr id="4" name="Content Placeholder 3"/>
           <p:cNvSpPr>
             <a:spLocks noGrp="1"/>
           </p:cNvSpPr>
@@ -1378,8 +1220,8 @@
         </p:nvSpPr>
         <p:spPr>
           <a:xfrm>
-            <a:off x="6172200" y="1825625"/>
-            <a:ext cx="5181600" cy="4351338"/>
+            <a:off x="3098155" y="1053960"/>
+            <a:ext cx="2600921" cy="2512092"/>
           </a:xfrm>
         </p:spPr>
         <p:txBody>
@@ -1419,18 +1261,13 @@
               <a:rPr lang="zh-CN" altLang="en-US"/>
               <a:t>五级</a:t>
             </a:r>
-          </a:p>
-        </p:txBody>
-      </p:sp>
-      <p:sp>
-        <p:nvSpPr>
-          <p:cNvPr id="5" name="日期占位符 4">
-            <a:extLst>
-              <a:ext uri="{FF2B5EF4-FFF2-40B4-BE49-F238E27FC236}">
-                <a16:creationId xmlns:a16="http://schemas.microsoft.com/office/drawing/2014/main" id="{79DEF6B7-CD39-217B-1619-424AB575A036}"/>
-              </a:ext>
-            </a:extLst>
-          </p:cNvPr>
+            <a:endParaRPr lang="en-US" dirty="0"/>
+          </a:p>
+        </p:txBody>
+      </p:sp>
+      <p:sp>
+        <p:nvSpPr>
+          <p:cNvPr id="5" name="Date Placeholder 4"/>
           <p:cNvSpPr>
             <a:spLocks noGrp="1"/>
           </p:cNvSpPr>
@@ -1445,7 +1282,7 @@
           <a:p>
             <a:fld id="{0D913D72-DA84-4294-82A6-28AD38AC8E6C}" type="datetimeFigureOut">
               <a:rPr lang="zh-CN" altLang="en-US" smtClean="0"/>
-              <a:t>2026/3/17</a:t>
+              <a:t>2026/3/25</a:t>
             </a:fld>
             <a:endParaRPr lang="zh-CN" altLang="en-US"/>
           </a:p>
@@ -1453,13 +1290,7 @@
       </p:sp>
       <p:sp>
         <p:nvSpPr>
-          <p:cNvPr id="6" name="页脚占位符 5">
-            <a:extLst>
-              <a:ext uri="{FF2B5EF4-FFF2-40B4-BE49-F238E27FC236}">
-                <a16:creationId xmlns:a16="http://schemas.microsoft.com/office/drawing/2014/main" id="{7E625FC6-CBC5-2187-93D9-123BF7213ECF}"/>
-              </a:ext>
-            </a:extLst>
-          </p:cNvPr>
+          <p:cNvPr id="6" name="Footer Placeholder 5"/>
           <p:cNvSpPr>
             <a:spLocks noGrp="1"/>
           </p:cNvSpPr>
@@ -1478,13 +1309,7 @@
       </p:sp>
       <p:sp>
         <p:nvSpPr>
-          <p:cNvPr id="7" name="灯片编号占位符 6">
-            <a:extLst>
-              <a:ext uri="{FF2B5EF4-FFF2-40B4-BE49-F238E27FC236}">
-                <a16:creationId xmlns:a16="http://schemas.microsoft.com/office/drawing/2014/main" id="{9D0DFA4B-59BB-CC49-9B4D-BF0445518896}"/>
-              </a:ext>
-            </a:extLst>
-          </p:cNvPr>
+          <p:cNvPr id="7" name="Slide Number Placeholder 6"/>
           <p:cNvSpPr>
             <a:spLocks noGrp="1"/>
           </p:cNvSpPr>
@@ -1508,7 +1333,7 @@
     </p:spTree>
     <p:extLst>
       <p:ext uri="{BB962C8B-B14F-4D97-AF65-F5344CB8AC3E}">
-        <p14:creationId xmlns:p14="http://schemas.microsoft.com/office/powerpoint/2010/main" val="1486243650"/>
+        <p14:creationId xmlns:p14="http://schemas.microsoft.com/office/powerpoint/2010/main" val="1427141918"/>
       </p:ext>
     </p:extLst>
   </p:cSld>
@@ -1537,13 +1362,7 @@
       </p:grpSpPr>
       <p:sp>
         <p:nvSpPr>
-          <p:cNvPr id="2" name="标题 1">
-            <a:extLst>
-              <a:ext uri="{FF2B5EF4-FFF2-40B4-BE49-F238E27FC236}">
-                <a16:creationId xmlns:a16="http://schemas.microsoft.com/office/drawing/2014/main" id="{64D0BDBF-4024-8091-4577-D28C41CD1910}"/>
-              </a:ext>
-            </a:extLst>
-          </p:cNvPr>
+          <p:cNvPr id="2" name="Title 1"/>
           <p:cNvSpPr>
             <a:spLocks noGrp="1"/>
           </p:cNvSpPr>
@@ -1553,8 +1372,8 @@
         </p:nvSpPr>
         <p:spPr>
           <a:xfrm>
-            <a:off x="839788" y="365125"/>
-            <a:ext cx="10515600" cy="1325563"/>
+            <a:off x="421534" y="210793"/>
+            <a:ext cx="5278339" cy="765267"/>
           </a:xfrm>
         </p:spPr>
         <p:txBody>
@@ -1565,18 +1384,13 @@
               <a:rPr lang="zh-CN" altLang="en-US"/>
               <a:t>单击此处编辑母版标题样式</a:t>
             </a:r>
-          </a:p>
-        </p:txBody>
-      </p:sp>
-      <p:sp>
-        <p:nvSpPr>
-          <p:cNvPr id="3" name="文本占位符 2">
-            <a:extLst>
-              <a:ext uri="{FF2B5EF4-FFF2-40B4-BE49-F238E27FC236}">
-                <a16:creationId xmlns:a16="http://schemas.microsoft.com/office/drawing/2014/main" id="{C6BF870B-51B5-2831-8E6E-596B09CA9094}"/>
-              </a:ext>
-            </a:extLst>
-          </p:cNvPr>
+            <a:endParaRPr lang="en-US" dirty="0"/>
+          </a:p>
+        </p:txBody>
+      </p:sp>
+      <p:sp>
+        <p:nvSpPr>
+          <p:cNvPr id="3" name="Text Placeholder 2"/>
           <p:cNvSpPr>
             <a:spLocks noGrp="1"/>
           </p:cNvSpPr>
@@ -1586,8 +1400,8 @@
         </p:nvSpPr>
         <p:spPr>
           <a:xfrm>
-            <a:off x="839788" y="1681163"/>
-            <a:ext cx="5157787" cy="823912"/>
+            <a:off x="421535" y="970560"/>
+            <a:ext cx="2588967" cy="475657"/>
           </a:xfrm>
         </p:spPr>
         <p:txBody>
@@ -1595,39 +1409,39 @@
           <a:lstStyle>
             <a:lvl1pPr marL="0" indent="0">
               <a:buNone/>
-              <a:defRPr sz="2400" b="1"/>
+              <a:defRPr sz="1386" b="1"/>
             </a:lvl1pPr>
-            <a:lvl2pPr marL="457200" indent="0">
-              <a:buNone/>
-              <a:defRPr sz="2000" b="1"/>
+            <a:lvl2pPr marL="263942" indent="0">
+              <a:buNone/>
+              <a:defRPr sz="1155" b="1"/>
             </a:lvl2pPr>
-            <a:lvl3pPr marL="914400" indent="0">
-              <a:buNone/>
-              <a:defRPr sz="1800" b="1"/>
+            <a:lvl3pPr marL="527883" indent="0">
+              <a:buNone/>
+              <a:defRPr sz="1039" b="1"/>
             </a:lvl3pPr>
-            <a:lvl4pPr marL="1371600" indent="0">
-              <a:buNone/>
-              <a:defRPr sz="1600" b="1"/>
+            <a:lvl4pPr marL="791825" indent="0">
+              <a:buNone/>
+              <a:defRPr sz="924" b="1"/>
             </a:lvl4pPr>
-            <a:lvl5pPr marL="1828800" indent="0">
-              <a:buNone/>
-              <a:defRPr sz="1600" b="1"/>
+            <a:lvl5pPr marL="1055766" indent="0">
+              <a:buNone/>
+              <a:defRPr sz="924" b="1"/>
             </a:lvl5pPr>
-            <a:lvl6pPr marL="2286000" indent="0">
-              <a:buNone/>
-              <a:defRPr sz="1600" b="1"/>
+            <a:lvl6pPr marL="1319708" indent="0">
+              <a:buNone/>
+              <a:defRPr sz="924" b="1"/>
             </a:lvl6pPr>
-            <a:lvl7pPr marL="2743200" indent="0">
-              <a:buNone/>
-              <a:defRPr sz="1600" b="1"/>
+            <a:lvl7pPr marL="1583649" indent="0">
+              <a:buNone/>
+              <a:defRPr sz="924" b="1"/>
             </a:lvl7pPr>
-            <a:lvl8pPr marL="3200400" indent="0">
-              <a:buNone/>
-              <a:defRPr sz="1600" b="1"/>
+            <a:lvl8pPr marL="1847591" indent="0">
+              <a:buNone/>
+              <a:defRPr sz="924" b="1"/>
             </a:lvl8pPr>
-            <a:lvl9pPr marL="3657600" indent="0">
-              <a:buNone/>
-              <a:defRPr sz="1600" b="1"/>
+            <a:lvl9pPr marL="2111532" indent="0">
+              <a:buNone/>
+              <a:defRPr sz="924" b="1"/>
             </a:lvl9pPr>
           </a:lstStyle>
           <a:p>
@@ -1641,13 +1455,7 @@
       </p:sp>
       <p:sp>
         <p:nvSpPr>
-          <p:cNvPr id="4" name="内容占位符 3">
-            <a:extLst>
-              <a:ext uri="{FF2B5EF4-FFF2-40B4-BE49-F238E27FC236}">
-                <a16:creationId xmlns:a16="http://schemas.microsoft.com/office/drawing/2014/main" id="{78767A79-835C-81F2-31D7-C7601162EA0E}"/>
-              </a:ext>
-            </a:extLst>
-          </p:cNvPr>
+          <p:cNvPr id="4" name="Content Placeholder 3"/>
           <p:cNvSpPr>
             <a:spLocks noGrp="1"/>
           </p:cNvSpPr>
@@ -1657,8 +1465,8 @@
         </p:nvSpPr>
         <p:spPr>
           <a:xfrm>
-            <a:off x="839788" y="2505075"/>
-            <a:ext cx="5157787" cy="3684588"/>
+            <a:off x="421535" y="1446217"/>
+            <a:ext cx="2588967" cy="2127167"/>
           </a:xfrm>
         </p:spPr>
         <p:txBody>
@@ -1698,18 +1506,13 @@
               <a:rPr lang="zh-CN" altLang="en-US"/>
               <a:t>五级</a:t>
             </a:r>
-          </a:p>
-        </p:txBody>
-      </p:sp>
-      <p:sp>
-        <p:nvSpPr>
-          <p:cNvPr id="5" name="文本占位符 4">
-            <a:extLst>
-              <a:ext uri="{FF2B5EF4-FFF2-40B4-BE49-F238E27FC236}">
-                <a16:creationId xmlns:a16="http://schemas.microsoft.com/office/drawing/2014/main" id="{F03A6367-571B-9BDE-8882-1B948E43B4D8}"/>
-              </a:ext>
-            </a:extLst>
-          </p:cNvPr>
+            <a:endParaRPr lang="en-US" dirty="0"/>
+          </a:p>
+        </p:txBody>
+      </p:sp>
+      <p:sp>
+        <p:nvSpPr>
+          <p:cNvPr id="5" name="Text Placeholder 4"/>
           <p:cNvSpPr>
             <a:spLocks noGrp="1"/>
           </p:cNvSpPr>
@@ -1719,8 +1522,8 @@
         </p:nvSpPr>
         <p:spPr>
           <a:xfrm>
-            <a:off x="6172200" y="1681163"/>
-            <a:ext cx="5183188" cy="823912"/>
+            <a:off x="3098155" y="970560"/>
+            <a:ext cx="2601718" cy="475657"/>
           </a:xfrm>
         </p:spPr>
         <p:txBody>
@@ -1728,39 +1531,39 @@
           <a:lstStyle>
             <a:lvl1pPr marL="0" indent="0">
               <a:buNone/>
-              <a:defRPr sz="2400" b="1"/>
+              <a:defRPr sz="1386" b="1"/>
             </a:lvl1pPr>
-            <a:lvl2pPr marL="457200" indent="0">
-              <a:buNone/>
-              <a:defRPr sz="2000" b="1"/>
+            <a:lvl2pPr marL="263942" indent="0">
+              <a:buNone/>
+              <a:defRPr sz="1155" b="1"/>
             </a:lvl2pPr>
-            <a:lvl3pPr marL="914400" indent="0">
-              <a:buNone/>
-              <a:defRPr sz="1800" b="1"/>
+            <a:lvl3pPr marL="527883" indent="0">
+              <a:buNone/>
+              <a:defRPr sz="1039" b="1"/>
             </a:lvl3pPr>
-            <a:lvl4pPr marL="1371600" indent="0">
-              <a:buNone/>
-              <a:defRPr sz="1600" b="1"/>
+            <a:lvl4pPr marL="791825" indent="0">
+              <a:buNone/>
+              <a:defRPr sz="924" b="1"/>
             </a:lvl4pPr>
-            <a:lvl5pPr marL="1828800" indent="0">
-              <a:buNone/>
-              <a:defRPr sz="1600" b="1"/>
+            <a:lvl5pPr marL="1055766" indent="0">
+              <a:buNone/>
+              <a:defRPr sz="924" b="1"/>
             </a:lvl5pPr>
-            <a:lvl6pPr marL="2286000" indent="0">
-              <a:buNone/>
-              <a:defRPr sz="1600" b="1"/>
+            <a:lvl6pPr marL="1319708" indent="0">
+              <a:buNone/>
+              <a:defRPr sz="924" b="1"/>
             </a:lvl6pPr>
-            <a:lvl7pPr marL="2743200" indent="0">
-              <a:buNone/>
-              <a:defRPr sz="1600" b="1"/>
+            <a:lvl7pPr marL="1583649" indent="0">
+              <a:buNone/>
+              <a:defRPr sz="924" b="1"/>
             </a:lvl7pPr>
-            <a:lvl8pPr marL="3200400" indent="0">
-              <a:buNone/>
-              <a:defRPr sz="1600" b="1"/>
+            <a:lvl8pPr marL="1847591" indent="0">
+              <a:buNone/>
+              <a:defRPr sz="924" b="1"/>
             </a:lvl8pPr>
-            <a:lvl9pPr marL="3657600" indent="0">
-              <a:buNone/>
-              <a:defRPr sz="1600" b="1"/>
+            <a:lvl9pPr marL="2111532" indent="0">
+              <a:buNone/>
+              <a:defRPr sz="924" b="1"/>
             </a:lvl9pPr>
           </a:lstStyle>
           <a:p>
@@ -1774,13 +1577,7 @@
       </p:sp>
       <p:sp>
         <p:nvSpPr>
-          <p:cNvPr id="6" name="内容占位符 5">
-            <a:extLst>
-              <a:ext uri="{FF2B5EF4-FFF2-40B4-BE49-F238E27FC236}">
-                <a16:creationId xmlns:a16="http://schemas.microsoft.com/office/drawing/2014/main" id="{688A4060-4DB2-7B40-ABA5-760202558D39}"/>
-              </a:ext>
-            </a:extLst>
-          </p:cNvPr>
+          <p:cNvPr id="6" name="Content Placeholder 5"/>
           <p:cNvSpPr>
             <a:spLocks noGrp="1"/>
           </p:cNvSpPr>
@@ -1790,8 +1587,8 @@
         </p:nvSpPr>
         <p:spPr>
           <a:xfrm>
-            <a:off x="6172200" y="2505075"/>
-            <a:ext cx="5183188" cy="3684588"/>
+            <a:off x="3098155" y="1446217"/>
+            <a:ext cx="2601718" cy="2127167"/>
           </a:xfrm>
         </p:spPr>
         <p:txBody>
@@ -1831,18 +1628,13 @@
               <a:rPr lang="zh-CN" altLang="en-US"/>
               <a:t>五级</a:t>
             </a:r>
-          </a:p>
-        </p:txBody>
-      </p:sp>
-      <p:sp>
-        <p:nvSpPr>
-          <p:cNvPr id="7" name="日期占位符 6">
-            <a:extLst>
-              <a:ext uri="{FF2B5EF4-FFF2-40B4-BE49-F238E27FC236}">
-                <a16:creationId xmlns:a16="http://schemas.microsoft.com/office/drawing/2014/main" id="{F105C83C-BA26-DDD1-F809-AB5805E6AEA6}"/>
-              </a:ext>
-            </a:extLst>
-          </p:cNvPr>
+            <a:endParaRPr lang="en-US" dirty="0"/>
+          </a:p>
+        </p:txBody>
+      </p:sp>
+      <p:sp>
+        <p:nvSpPr>
+          <p:cNvPr id="7" name="Date Placeholder 6"/>
           <p:cNvSpPr>
             <a:spLocks noGrp="1"/>
           </p:cNvSpPr>
@@ -1857,7 +1649,7 @@
           <a:p>
             <a:fld id="{0D913D72-DA84-4294-82A6-28AD38AC8E6C}" type="datetimeFigureOut">
               <a:rPr lang="zh-CN" altLang="en-US" smtClean="0"/>
-              <a:t>2026/3/17</a:t>
+              <a:t>2026/3/25</a:t>
             </a:fld>
             <a:endParaRPr lang="zh-CN" altLang="en-US"/>
           </a:p>
@@ -1865,13 +1657,7 @@
       </p:sp>
       <p:sp>
         <p:nvSpPr>
-          <p:cNvPr id="8" name="页脚占位符 7">
-            <a:extLst>
-              <a:ext uri="{FF2B5EF4-FFF2-40B4-BE49-F238E27FC236}">
-                <a16:creationId xmlns:a16="http://schemas.microsoft.com/office/drawing/2014/main" id="{14F87BE5-78C3-0EB7-2EAD-FFB2B6376355}"/>
-              </a:ext>
-            </a:extLst>
-          </p:cNvPr>
+          <p:cNvPr id="8" name="Footer Placeholder 7"/>
           <p:cNvSpPr>
             <a:spLocks noGrp="1"/>
           </p:cNvSpPr>
@@ -1890,13 +1676,7 @@
       </p:sp>
       <p:sp>
         <p:nvSpPr>
-          <p:cNvPr id="9" name="灯片编号占位符 8">
-            <a:extLst>
-              <a:ext uri="{FF2B5EF4-FFF2-40B4-BE49-F238E27FC236}">
-                <a16:creationId xmlns:a16="http://schemas.microsoft.com/office/drawing/2014/main" id="{305845F8-D04E-721E-062A-7B1C6CA58069}"/>
-              </a:ext>
-            </a:extLst>
-          </p:cNvPr>
+          <p:cNvPr id="9" name="Slide Number Placeholder 8"/>
           <p:cNvSpPr>
             <a:spLocks noGrp="1"/>
           </p:cNvSpPr>
@@ -1920,7 +1700,7 @@
     </p:spTree>
     <p:extLst>
       <p:ext uri="{BB962C8B-B14F-4D97-AF65-F5344CB8AC3E}">
-        <p14:creationId xmlns:p14="http://schemas.microsoft.com/office/powerpoint/2010/main" val="2685124447"/>
+        <p14:creationId xmlns:p14="http://schemas.microsoft.com/office/powerpoint/2010/main" val="2852205735"/>
       </p:ext>
     </p:extLst>
   </p:cSld>
@@ -1949,13 +1729,7 @@
       </p:grpSpPr>
       <p:sp>
         <p:nvSpPr>
-          <p:cNvPr id="2" name="标题 1">
-            <a:extLst>
-              <a:ext uri="{FF2B5EF4-FFF2-40B4-BE49-F238E27FC236}">
-                <a16:creationId xmlns:a16="http://schemas.microsoft.com/office/drawing/2014/main" id="{03853D86-7A16-ED04-E863-E92C14B50453}"/>
-              </a:ext>
-            </a:extLst>
-          </p:cNvPr>
+          <p:cNvPr id="2" name="Title 1"/>
           <p:cNvSpPr>
             <a:spLocks noGrp="1"/>
           </p:cNvSpPr>
@@ -1972,18 +1746,13 @@
               <a:rPr lang="zh-CN" altLang="en-US"/>
               <a:t>单击此处编辑母版标题样式</a:t>
             </a:r>
-          </a:p>
-        </p:txBody>
-      </p:sp>
-      <p:sp>
-        <p:nvSpPr>
-          <p:cNvPr id="3" name="日期占位符 2">
-            <a:extLst>
-              <a:ext uri="{FF2B5EF4-FFF2-40B4-BE49-F238E27FC236}">
-                <a16:creationId xmlns:a16="http://schemas.microsoft.com/office/drawing/2014/main" id="{A205346C-75FF-1A21-43FE-36980355E910}"/>
-              </a:ext>
-            </a:extLst>
-          </p:cNvPr>
+            <a:endParaRPr lang="en-US" dirty="0"/>
+          </a:p>
+        </p:txBody>
+      </p:sp>
+      <p:sp>
+        <p:nvSpPr>
+          <p:cNvPr id="3" name="Date Placeholder 2"/>
           <p:cNvSpPr>
             <a:spLocks noGrp="1"/>
           </p:cNvSpPr>
@@ -1998,7 +1767,7 @@
           <a:p>
             <a:fld id="{0D913D72-DA84-4294-82A6-28AD38AC8E6C}" type="datetimeFigureOut">
               <a:rPr lang="zh-CN" altLang="en-US" smtClean="0"/>
-              <a:t>2026/3/17</a:t>
+              <a:t>2026/3/25</a:t>
             </a:fld>
             <a:endParaRPr lang="zh-CN" altLang="en-US"/>
           </a:p>
@@ -2006,13 +1775,7 @@
       </p:sp>
       <p:sp>
         <p:nvSpPr>
-          <p:cNvPr id="4" name="页脚占位符 3">
-            <a:extLst>
-              <a:ext uri="{FF2B5EF4-FFF2-40B4-BE49-F238E27FC236}">
-                <a16:creationId xmlns:a16="http://schemas.microsoft.com/office/drawing/2014/main" id="{A393C18D-8595-32EF-2F1D-48A6BE5F8EE4}"/>
-              </a:ext>
-            </a:extLst>
-          </p:cNvPr>
+          <p:cNvPr id="4" name="Footer Placeholder 3"/>
           <p:cNvSpPr>
             <a:spLocks noGrp="1"/>
           </p:cNvSpPr>
@@ -2031,13 +1794,7 @@
       </p:sp>
       <p:sp>
         <p:nvSpPr>
-          <p:cNvPr id="5" name="灯片编号占位符 4">
-            <a:extLst>
-              <a:ext uri="{FF2B5EF4-FFF2-40B4-BE49-F238E27FC236}">
-                <a16:creationId xmlns:a16="http://schemas.microsoft.com/office/drawing/2014/main" id="{58746182-8F78-011F-BCA8-C577FD804044}"/>
-              </a:ext>
-            </a:extLst>
-          </p:cNvPr>
+          <p:cNvPr id="5" name="Slide Number Placeholder 4"/>
           <p:cNvSpPr>
             <a:spLocks noGrp="1"/>
           </p:cNvSpPr>
@@ -2061,7 +1818,7 @@
     </p:spTree>
     <p:extLst>
       <p:ext uri="{BB962C8B-B14F-4D97-AF65-F5344CB8AC3E}">
-        <p14:creationId xmlns:p14="http://schemas.microsoft.com/office/powerpoint/2010/main" val="3925596398"/>
+        <p14:creationId xmlns:p14="http://schemas.microsoft.com/office/powerpoint/2010/main" val="1715293333"/>
       </p:ext>
     </p:extLst>
   </p:cSld>
@@ -2090,13 +1847,7 @@
       </p:grpSpPr>
       <p:sp>
         <p:nvSpPr>
-          <p:cNvPr id="2" name="日期占位符 1">
-            <a:extLst>
-              <a:ext uri="{FF2B5EF4-FFF2-40B4-BE49-F238E27FC236}">
-                <a16:creationId xmlns:a16="http://schemas.microsoft.com/office/drawing/2014/main" id="{B13449E3-4A84-D021-EE9C-D75AE74B0EC8}"/>
-              </a:ext>
-            </a:extLst>
-          </p:cNvPr>
+          <p:cNvPr id="2" name="Date Placeholder 1"/>
           <p:cNvSpPr>
             <a:spLocks noGrp="1"/>
           </p:cNvSpPr>
@@ -2111,7 +1862,7 @@
           <a:p>
             <a:fld id="{0D913D72-DA84-4294-82A6-28AD38AC8E6C}" type="datetimeFigureOut">
               <a:rPr lang="zh-CN" altLang="en-US" smtClean="0"/>
-              <a:t>2026/3/17</a:t>
+              <a:t>2026/3/25</a:t>
             </a:fld>
             <a:endParaRPr lang="zh-CN" altLang="en-US"/>
           </a:p>
@@ -2119,13 +1870,7 @@
       </p:sp>
       <p:sp>
         <p:nvSpPr>
-          <p:cNvPr id="3" name="页脚占位符 2">
-            <a:extLst>
-              <a:ext uri="{FF2B5EF4-FFF2-40B4-BE49-F238E27FC236}">
-                <a16:creationId xmlns:a16="http://schemas.microsoft.com/office/drawing/2014/main" id="{17A2121D-B9C2-3C68-B45E-ED6FE2643D71}"/>
-              </a:ext>
-            </a:extLst>
-          </p:cNvPr>
+          <p:cNvPr id="3" name="Footer Placeholder 2"/>
           <p:cNvSpPr>
             <a:spLocks noGrp="1"/>
           </p:cNvSpPr>
@@ -2144,13 +1889,7 @@
       </p:sp>
       <p:sp>
         <p:nvSpPr>
-          <p:cNvPr id="4" name="灯片编号占位符 3">
-            <a:extLst>
-              <a:ext uri="{FF2B5EF4-FFF2-40B4-BE49-F238E27FC236}">
-                <a16:creationId xmlns:a16="http://schemas.microsoft.com/office/drawing/2014/main" id="{A9270BCE-501D-D39A-B109-0CE36D7AB7AA}"/>
-              </a:ext>
-            </a:extLst>
-          </p:cNvPr>
+          <p:cNvPr id="4" name="Slide Number Placeholder 3"/>
           <p:cNvSpPr>
             <a:spLocks noGrp="1"/>
           </p:cNvSpPr>
@@ -2174,7 +1913,7 @@
     </p:spTree>
     <p:extLst>
       <p:ext uri="{BB962C8B-B14F-4D97-AF65-F5344CB8AC3E}">
-        <p14:creationId xmlns:p14="http://schemas.microsoft.com/office/powerpoint/2010/main" val="4130619713"/>
+        <p14:creationId xmlns:p14="http://schemas.microsoft.com/office/powerpoint/2010/main" val="1454160607"/>
       </p:ext>
     </p:extLst>
   </p:cSld>
@@ -2203,13 +1942,7 @@
       </p:grpSpPr>
       <p:sp>
         <p:nvSpPr>
-          <p:cNvPr id="2" name="标题 1">
-            <a:extLst>
-              <a:ext uri="{FF2B5EF4-FFF2-40B4-BE49-F238E27FC236}">
-                <a16:creationId xmlns:a16="http://schemas.microsoft.com/office/drawing/2014/main" id="{1C0A9865-A697-50F7-BC46-B4B26C9B6B54}"/>
-              </a:ext>
-            </a:extLst>
-          </p:cNvPr>
+          <p:cNvPr id="2" name="Title 1"/>
           <p:cNvSpPr>
             <a:spLocks noGrp="1"/>
           </p:cNvSpPr>
@@ -2219,15 +1952,15 @@
         </p:nvSpPr>
         <p:spPr>
           <a:xfrm>
-            <a:off x="839788" y="457200"/>
-            <a:ext cx="3932237" cy="1600200"/>
+            <a:off x="421534" y="263948"/>
+            <a:ext cx="1973799" cy="923819"/>
           </a:xfrm>
         </p:spPr>
         <p:txBody>
           <a:bodyPr anchor="b"/>
           <a:lstStyle>
             <a:lvl1pPr>
-              <a:defRPr sz="3200"/>
+              <a:defRPr sz="1847"/>
             </a:lvl1pPr>
           </a:lstStyle>
           <a:p>
@@ -2235,18 +1968,13 @@
               <a:rPr lang="zh-CN" altLang="en-US"/>
               <a:t>单击此处编辑母版标题样式</a:t>
             </a:r>
-          </a:p>
-        </p:txBody>
-      </p:sp>
-      <p:sp>
-        <p:nvSpPr>
-          <p:cNvPr id="3" name="内容占位符 2">
-            <a:extLst>
-              <a:ext uri="{FF2B5EF4-FFF2-40B4-BE49-F238E27FC236}">
-                <a16:creationId xmlns:a16="http://schemas.microsoft.com/office/drawing/2014/main" id="{97F2258E-A961-0074-E42B-9F9864084118}"/>
-              </a:ext>
-            </a:extLst>
-          </p:cNvPr>
+            <a:endParaRPr lang="en-US" dirty="0"/>
+          </a:p>
+        </p:txBody>
+      </p:sp>
+      <p:sp>
+        <p:nvSpPr>
+          <p:cNvPr id="3" name="Content Placeholder 2"/>
           <p:cNvSpPr>
             <a:spLocks noGrp="1"/>
           </p:cNvSpPr>
@@ -2256,39 +1984,39 @@
         </p:nvSpPr>
         <p:spPr>
           <a:xfrm>
-            <a:off x="5183188" y="987425"/>
-            <a:ext cx="6172200" cy="4873625"/>
+            <a:off x="2601718" y="570056"/>
+            <a:ext cx="3098155" cy="2813616"/>
           </a:xfrm>
         </p:spPr>
         <p:txBody>
           <a:bodyPr/>
           <a:lstStyle>
             <a:lvl1pPr>
-              <a:defRPr sz="3200"/>
+              <a:defRPr sz="1847"/>
             </a:lvl1pPr>
             <a:lvl2pPr>
-              <a:defRPr sz="2800"/>
+              <a:defRPr sz="1616"/>
             </a:lvl2pPr>
             <a:lvl3pPr>
-              <a:defRPr sz="2400"/>
+              <a:defRPr sz="1386"/>
             </a:lvl3pPr>
             <a:lvl4pPr>
-              <a:defRPr sz="2000"/>
+              <a:defRPr sz="1155"/>
             </a:lvl4pPr>
             <a:lvl5pPr>
-              <a:defRPr sz="2000"/>
+              <a:defRPr sz="1155"/>
             </a:lvl5pPr>
             <a:lvl6pPr>
-              <a:defRPr sz="2000"/>
+              <a:defRPr sz="1155"/>
             </a:lvl6pPr>
             <a:lvl7pPr>
-              <a:defRPr sz="2000"/>
+              <a:defRPr sz="1155"/>
             </a:lvl7pPr>
             <a:lvl8pPr>
-              <a:defRPr sz="2000"/>
+              <a:defRPr sz="1155"/>
             </a:lvl8pPr>
             <a:lvl9pPr>
-              <a:defRPr sz="2000"/>
+              <a:defRPr sz="1155"/>
             </a:lvl9pPr>
           </a:lstStyle>
           <a:p>
@@ -2325,18 +2053,13 @@
               <a:rPr lang="zh-CN" altLang="en-US"/>
               <a:t>五级</a:t>
             </a:r>
-          </a:p>
-        </p:txBody>
-      </p:sp>
-      <p:sp>
-        <p:nvSpPr>
-          <p:cNvPr id="4" name="文本占位符 3">
-            <a:extLst>
-              <a:ext uri="{FF2B5EF4-FFF2-40B4-BE49-F238E27FC236}">
-                <a16:creationId xmlns:a16="http://schemas.microsoft.com/office/drawing/2014/main" id="{73123071-2D31-0198-B6D4-AAF9D82522E7}"/>
-              </a:ext>
-            </a:extLst>
-          </p:cNvPr>
+            <a:endParaRPr lang="en-US" dirty="0"/>
+          </a:p>
+        </p:txBody>
+      </p:sp>
+      <p:sp>
+        <p:nvSpPr>
+          <p:cNvPr id="4" name="Text Placeholder 3"/>
           <p:cNvSpPr>
             <a:spLocks noGrp="1"/>
           </p:cNvSpPr>
@@ -2346,8 +2069,8 @@
         </p:nvSpPr>
         <p:spPr>
           <a:xfrm>
-            <a:off x="839788" y="2057400"/>
-            <a:ext cx="3932237" cy="3811588"/>
+            <a:off x="421534" y="1187768"/>
+            <a:ext cx="1973799" cy="2200486"/>
           </a:xfrm>
         </p:spPr>
         <p:txBody>
@@ -2355,39 +2078,39 @@
           <a:lstStyle>
             <a:lvl1pPr marL="0" indent="0">
               <a:buNone/>
-              <a:defRPr sz="1600"/>
+              <a:defRPr sz="924"/>
             </a:lvl1pPr>
-            <a:lvl2pPr marL="457200" indent="0">
-              <a:buNone/>
-              <a:defRPr sz="1400"/>
+            <a:lvl2pPr marL="263942" indent="0">
+              <a:buNone/>
+              <a:defRPr sz="808"/>
             </a:lvl2pPr>
-            <a:lvl3pPr marL="914400" indent="0">
-              <a:buNone/>
-              <a:defRPr sz="1200"/>
+            <a:lvl3pPr marL="527883" indent="0">
+              <a:buNone/>
+              <a:defRPr sz="693"/>
             </a:lvl3pPr>
-            <a:lvl4pPr marL="1371600" indent="0">
-              <a:buNone/>
-              <a:defRPr sz="1000"/>
+            <a:lvl4pPr marL="791825" indent="0">
+              <a:buNone/>
+              <a:defRPr sz="577"/>
             </a:lvl4pPr>
-            <a:lvl5pPr marL="1828800" indent="0">
-              <a:buNone/>
-              <a:defRPr sz="1000"/>
+            <a:lvl5pPr marL="1055766" indent="0">
+              <a:buNone/>
+              <a:defRPr sz="577"/>
             </a:lvl5pPr>
-            <a:lvl6pPr marL="2286000" indent="0">
-              <a:buNone/>
-              <a:defRPr sz="1000"/>
+            <a:lvl6pPr marL="1319708" indent="0">
+              <a:buNone/>
+              <a:defRPr sz="577"/>
             </a:lvl6pPr>
-            <a:lvl7pPr marL="2743200" indent="0">
-              <a:buNone/>
-              <a:defRPr sz="1000"/>
+            <a:lvl7pPr marL="1583649" indent="0">
+              <a:buNone/>
+              <a:defRPr sz="577"/>
             </a:lvl7pPr>
-            <a:lvl8pPr marL="3200400" indent="0">
-              <a:buNone/>
-              <a:defRPr sz="1000"/>
+            <a:lvl8pPr marL="1847591" indent="0">
+              <a:buNone/>
+              <a:defRPr sz="577"/>
             </a:lvl8pPr>
-            <a:lvl9pPr marL="3657600" indent="0">
-              <a:buNone/>
-              <a:defRPr sz="1000"/>
+            <a:lvl9pPr marL="2111532" indent="0">
+              <a:buNone/>
+              <a:defRPr sz="577"/>
             </a:lvl9pPr>
           </a:lstStyle>
           <a:p>
@@ -2401,13 +2124,7 @@
       </p:sp>
       <p:sp>
         <p:nvSpPr>
-          <p:cNvPr id="5" name="日期占位符 4">
-            <a:extLst>
-              <a:ext uri="{FF2B5EF4-FFF2-40B4-BE49-F238E27FC236}">
-                <a16:creationId xmlns:a16="http://schemas.microsoft.com/office/drawing/2014/main" id="{44F24A0B-A32B-C73E-E753-AAC9D13C8CEF}"/>
-              </a:ext>
-            </a:extLst>
-          </p:cNvPr>
+          <p:cNvPr id="5" name="Date Placeholder 4"/>
           <p:cNvSpPr>
             <a:spLocks noGrp="1"/>
           </p:cNvSpPr>
@@ -2422,7 +2139,7 @@
           <a:p>
             <a:fld id="{0D913D72-DA84-4294-82A6-28AD38AC8E6C}" type="datetimeFigureOut">
               <a:rPr lang="zh-CN" altLang="en-US" smtClean="0"/>
-              <a:t>2026/3/17</a:t>
+              <a:t>2026/3/25</a:t>
             </a:fld>
             <a:endParaRPr lang="zh-CN" altLang="en-US"/>
           </a:p>
@@ -2430,13 +2147,7 @@
       </p:sp>
       <p:sp>
         <p:nvSpPr>
-          <p:cNvPr id="6" name="页脚占位符 5">
-            <a:extLst>
-              <a:ext uri="{FF2B5EF4-FFF2-40B4-BE49-F238E27FC236}">
-                <a16:creationId xmlns:a16="http://schemas.microsoft.com/office/drawing/2014/main" id="{A7999927-09FD-4D69-0D1A-EFBDF95C78F0}"/>
-              </a:ext>
-            </a:extLst>
-          </p:cNvPr>
+          <p:cNvPr id="6" name="Footer Placeholder 5"/>
           <p:cNvSpPr>
             <a:spLocks noGrp="1"/>
           </p:cNvSpPr>
@@ -2455,13 +2166,7 @@
       </p:sp>
       <p:sp>
         <p:nvSpPr>
-          <p:cNvPr id="7" name="灯片编号占位符 6">
-            <a:extLst>
-              <a:ext uri="{FF2B5EF4-FFF2-40B4-BE49-F238E27FC236}">
-                <a16:creationId xmlns:a16="http://schemas.microsoft.com/office/drawing/2014/main" id="{B4E73755-A462-CEA7-B397-790FC5F144E7}"/>
-              </a:ext>
-            </a:extLst>
-          </p:cNvPr>
+          <p:cNvPr id="7" name="Slide Number Placeholder 6"/>
           <p:cNvSpPr>
             <a:spLocks noGrp="1"/>
           </p:cNvSpPr>
@@ -2485,7 +2190,7 @@
     </p:spTree>
     <p:extLst>
       <p:ext uri="{BB962C8B-B14F-4D97-AF65-F5344CB8AC3E}">
-        <p14:creationId xmlns:p14="http://schemas.microsoft.com/office/powerpoint/2010/main" val="3938188594"/>
+        <p14:creationId xmlns:p14="http://schemas.microsoft.com/office/powerpoint/2010/main" val="2385002905"/>
       </p:ext>
     </p:extLst>
   </p:cSld>
@@ -2514,13 +2219,7 @@
       </p:grpSpPr>
       <p:sp>
         <p:nvSpPr>
-          <p:cNvPr id="2" name="标题 1">
-            <a:extLst>
-              <a:ext uri="{FF2B5EF4-FFF2-40B4-BE49-F238E27FC236}">
-                <a16:creationId xmlns:a16="http://schemas.microsoft.com/office/drawing/2014/main" id="{EBC608A5-F958-ABAE-9524-916345AA5A31}"/>
-              </a:ext>
-            </a:extLst>
-          </p:cNvPr>
+          <p:cNvPr id="2" name="Title 1"/>
           <p:cNvSpPr>
             <a:spLocks noGrp="1"/>
           </p:cNvSpPr>
@@ -2530,15 +2229,15 @@
         </p:nvSpPr>
         <p:spPr>
           <a:xfrm>
-            <a:off x="839788" y="457200"/>
-            <a:ext cx="3932237" cy="1600200"/>
+            <a:off x="421534" y="263948"/>
+            <a:ext cx="1973799" cy="923819"/>
           </a:xfrm>
         </p:spPr>
         <p:txBody>
           <a:bodyPr anchor="b"/>
           <a:lstStyle>
             <a:lvl1pPr>
-              <a:defRPr sz="3200"/>
+              <a:defRPr sz="1847"/>
             </a:lvl1pPr>
           </a:lstStyle>
           <a:p>
@@ -2546,20 +2245,15 @@
               <a:rPr lang="zh-CN" altLang="en-US"/>
               <a:t>单击此处编辑母版标题样式</a:t>
             </a:r>
-          </a:p>
-        </p:txBody>
-      </p:sp>
-      <p:sp>
-        <p:nvSpPr>
-          <p:cNvPr id="3" name="图片占位符 2">
-            <a:extLst>
-              <a:ext uri="{FF2B5EF4-FFF2-40B4-BE49-F238E27FC236}">
-                <a16:creationId xmlns:a16="http://schemas.microsoft.com/office/drawing/2014/main" id="{34ADE1C5-B0CC-9A28-4390-1B7CA673799B}"/>
-              </a:ext>
-            </a:extLst>
-          </p:cNvPr>
-          <p:cNvSpPr>
-            <a:spLocks noGrp="1"/>
+            <a:endParaRPr lang="en-US" dirty="0"/>
+          </a:p>
+        </p:txBody>
+      </p:sp>
+      <p:sp>
+        <p:nvSpPr>
+          <p:cNvPr id="3" name="Picture Placeholder 2"/>
+          <p:cNvSpPr>
+            <a:spLocks noGrp="1" noChangeAspect="1"/>
           </p:cNvSpPr>
           <p:nvPr>
             <p:ph type="pic" idx="1"/>
@@ -2567,8 +2261,73 @@
         </p:nvSpPr>
         <p:spPr>
           <a:xfrm>
-            <a:off x="5183188" y="987425"/>
-            <a:ext cx="6172200" cy="4873625"/>
+            <a:off x="2601718" y="570056"/>
+            <a:ext cx="3098155" cy="2813616"/>
+          </a:xfrm>
+        </p:spPr>
+        <p:txBody>
+          <a:bodyPr anchor="t"/>
+          <a:lstStyle>
+            <a:lvl1pPr marL="0" indent="0">
+              <a:buNone/>
+              <a:defRPr sz="1847"/>
+            </a:lvl1pPr>
+            <a:lvl2pPr marL="263942" indent="0">
+              <a:buNone/>
+              <a:defRPr sz="1616"/>
+            </a:lvl2pPr>
+            <a:lvl3pPr marL="527883" indent="0">
+              <a:buNone/>
+              <a:defRPr sz="1386"/>
+            </a:lvl3pPr>
+            <a:lvl4pPr marL="791825" indent="0">
+              <a:buNone/>
+              <a:defRPr sz="1155"/>
+            </a:lvl4pPr>
+            <a:lvl5pPr marL="1055766" indent="0">
+              <a:buNone/>
+              <a:defRPr sz="1155"/>
+            </a:lvl5pPr>
+            <a:lvl6pPr marL="1319708" indent="0">
+              <a:buNone/>
+              <a:defRPr sz="1155"/>
+            </a:lvl6pPr>
+            <a:lvl7pPr marL="1583649" indent="0">
+              <a:buNone/>
+              <a:defRPr sz="1155"/>
+            </a:lvl7pPr>
+            <a:lvl8pPr marL="1847591" indent="0">
+              <a:buNone/>
+              <a:defRPr sz="1155"/>
+            </a:lvl8pPr>
+            <a:lvl9pPr marL="2111532" indent="0">
+              <a:buNone/>
+              <a:defRPr sz="1155"/>
+            </a:lvl9pPr>
+          </a:lstStyle>
+          <a:p>
+            <a:r>
+              <a:rPr lang="zh-CN" altLang="en-US"/>
+              <a:t>单击图标添加图片</a:t>
+            </a:r>
+            <a:endParaRPr lang="en-US" dirty="0"/>
+          </a:p>
+        </p:txBody>
+      </p:sp>
+      <p:sp>
+        <p:nvSpPr>
+          <p:cNvPr id="4" name="Text Placeholder 3"/>
+          <p:cNvSpPr>
+            <a:spLocks noGrp="1"/>
+          </p:cNvSpPr>
+          <p:nvPr>
+            <p:ph type="body" sz="half" idx="2"/>
+          </p:nvPr>
+        </p:nvSpPr>
+        <p:spPr>
+          <a:xfrm>
+            <a:off x="421534" y="1187768"/>
+            <a:ext cx="1973799" cy="2200486"/>
           </a:xfrm>
         </p:spPr>
         <p:txBody>
@@ -2576,109 +2335,42 @@
           <a:lstStyle>
             <a:lvl1pPr marL="0" indent="0">
               <a:buNone/>
-              <a:defRPr sz="3200"/>
+              <a:defRPr sz="924"/>
             </a:lvl1pPr>
-            <a:lvl2pPr marL="457200" indent="0">
-              <a:buNone/>
-              <a:defRPr sz="2800"/>
+            <a:lvl2pPr marL="263942" indent="0">
+              <a:buNone/>
+              <a:defRPr sz="808"/>
             </a:lvl2pPr>
-            <a:lvl3pPr marL="914400" indent="0">
-              <a:buNone/>
-              <a:defRPr sz="2400"/>
+            <a:lvl3pPr marL="527883" indent="0">
+              <a:buNone/>
+              <a:defRPr sz="693"/>
             </a:lvl3pPr>
-            <a:lvl4pPr marL="1371600" indent="0">
-              <a:buNone/>
-              <a:defRPr sz="2000"/>
+            <a:lvl4pPr marL="791825" indent="0">
+              <a:buNone/>
+              <a:defRPr sz="577"/>
             </a:lvl4pPr>
-            <a:lvl5pPr marL="1828800" indent="0">
-              <a:buNone/>
-              <a:defRPr sz="2000"/>
+            <a:lvl5pPr marL="1055766" indent="0">
+              <a:buNone/>
+              <a:defRPr sz="577"/>
             </a:lvl5pPr>
-            <a:lvl6pPr marL="2286000" indent="0">
-              <a:buNone/>
-              <a:defRPr sz="2000"/>
+            <a:lvl6pPr marL="1319708" indent="0">
+              <a:buNone/>
+              <a:defRPr sz="577"/>
             </a:lvl6pPr>
-            <a:lvl7pPr marL="2743200" indent="0">
-              <a:buNone/>
-              <a:defRPr sz="2000"/>
+            <a:lvl7pPr marL="1583649" indent="0">
+              <a:buNone/>
+              <a:defRPr sz="577"/>
             </a:lvl7pPr>
-            <a:lvl8pPr marL="3200400" indent="0">
-              <a:buNone/>
-              <a:defRPr sz="2000"/>
+            <a:lvl8pPr marL="1847591" indent="0">
+              <a:buNone/>
+              <a:defRPr sz="577"/>
             </a:lvl8pPr>
-            <a:lvl9pPr marL="3657600" indent="0">
-              <a:buNone/>
-              <a:defRPr sz="2000"/>
+            <a:lvl9pPr marL="2111532" indent="0">
+              <a:buNone/>
+              <a:defRPr sz="577"/>
             </a:lvl9pPr>
           </a:lstStyle>
           <a:p>
-            <a:endParaRPr lang="zh-CN" altLang="en-US"/>
-          </a:p>
-        </p:txBody>
-      </p:sp>
-      <p:sp>
-        <p:nvSpPr>
-          <p:cNvPr id="4" name="文本占位符 3">
-            <a:extLst>
-              <a:ext uri="{FF2B5EF4-FFF2-40B4-BE49-F238E27FC236}">
-                <a16:creationId xmlns:a16="http://schemas.microsoft.com/office/drawing/2014/main" id="{AAC300EE-F830-59EC-8CFF-A7E1C789009C}"/>
-              </a:ext>
-            </a:extLst>
-          </p:cNvPr>
-          <p:cNvSpPr>
-            <a:spLocks noGrp="1"/>
-          </p:cNvSpPr>
-          <p:nvPr>
-            <p:ph type="body" sz="half" idx="2"/>
-          </p:nvPr>
-        </p:nvSpPr>
-        <p:spPr>
-          <a:xfrm>
-            <a:off x="839788" y="2057400"/>
-            <a:ext cx="3932237" cy="3811588"/>
-          </a:xfrm>
-        </p:spPr>
-        <p:txBody>
-          <a:bodyPr/>
-          <a:lstStyle>
-            <a:lvl1pPr marL="0" indent="0">
-              <a:buNone/>
-              <a:defRPr sz="1600"/>
-            </a:lvl1pPr>
-            <a:lvl2pPr marL="457200" indent="0">
-              <a:buNone/>
-              <a:defRPr sz="1400"/>
-            </a:lvl2pPr>
-            <a:lvl3pPr marL="914400" indent="0">
-              <a:buNone/>
-              <a:defRPr sz="1200"/>
-            </a:lvl3pPr>
-            <a:lvl4pPr marL="1371600" indent="0">
-              <a:buNone/>
-              <a:defRPr sz="1000"/>
-            </a:lvl4pPr>
-            <a:lvl5pPr marL="1828800" indent="0">
-              <a:buNone/>
-              <a:defRPr sz="1000"/>
-            </a:lvl5pPr>
-            <a:lvl6pPr marL="2286000" indent="0">
-              <a:buNone/>
-              <a:defRPr sz="1000"/>
-            </a:lvl6pPr>
-            <a:lvl7pPr marL="2743200" indent="0">
-              <a:buNone/>
-              <a:defRPr sz="1000"/>
-            </a:lvl7pPr>
-            <a:lvl8pPr marL="3200400" indent="0">
-              <a:buNone/>
-              <a:defRPr sz="1000"/>
-            </a:lvl8pPr>
-            <a:lvl9pPr marL="3657600" indent="0">
-              <a:buNone/>
-              <a:defRPr sz="1000"/>
-            </a:lvl9pPr>
-          </a:lstStyle>
-          <a:p>
             <a:pPr lvl="0"/>
             <a:r>
               <a:rPr lang="zh-CN" altLang="en-US"/>
@@ -2689,13 +2381,7 @@
       </p:sp>
       <p:sp>
         <p:nvSpPr>
-          <p:cNvPr id="5" name="日期占位符 4">
-            <a:extLst>
-              <a:ext uri="{FF2B5EF4-FFF2-40B4-BE49-F238E27FC236}">
-                <a16:creationId xmlns:a16="http://schemas.microsoft.com/office/drawing/2014/main" id="{62E78763-A8F6-4CF9-AA55-D3EEED29EF3E}"/>
-              </a:ext>
-            </a:extLst>
-          </p:cNvPr>
+          <p:cNvPr id="5" name="Date Placeholder 4"/>
           <p:cNvSpPr>
             <a:spLocks noGrp="1"/>
           </p:cNvSpPr>
@@ -2710,7 +2396,7 @@
           <a:p>
             <a:fld id="{0D913D72-DA84-4294-82A6-28AD38AC8E6C}" type="datetimeFigureOut">
               <a:rPr lang="zh-CN" altLang="en-US" smtClean="0"/>
-              <a:t>2026/3/17</a:t>
+              <a:t>2026/3/25</a:t>
             </a:fld>
             <a:endParaRPr lang="zh-CN" altLang="en-US"/>
           </a:p>
@@ -2718,13 +2404,7 @@
       </p:sp>
       <p:sp>
         <p:nvSpPr>
-          <p:cNvPr id="6" name="页脚占位符 5">
-            <a:extLst>
-              <a:ext uri="{FF2B5EF4-FFF2-40B4-BE49-F238E27FC236}">
-                <a16:creationId xmlns:a16="http://schemas.microsoft.com/office/drawing/2014/main" id="{43BA7CCD-CA7C-84E7-9DAD-5DF2B0FD9E5C}"/>
-              </a:ext>
-            </a:extLst>
-          </p:cNvPr>
+          <p:cNvPr id="6" name="Footer Placeholder 5"/>
           <p:cNvSpPr>
             <a:spLocks noGrp="1"/>
           </p:cNvSpPr>
@@ -2743,13 +2423,7 @@
       </p:sp>
       <p:sp>
         <p:nvSpPr>
-          <p:cNvPr id="7" name="灯片编号占位符 6">
-            <a:extLst>
-              <a:ext uri="{FF2B5EF4-FFF2-40B4-BE49-F238E27FC236}">
-                <a16:creationId xmlns:a16="http://schemas.microsoft.com/office/drawing/2014/main" id="{DBAB9C6D-8D41-30B4-0693-F2A2BBD5E4B8}"/>
-              </a:ext>
-            </a:extLst>
-          </p:cNvPr>
+          <p:cNvPr id="7" name="Slide Number Placeholder 6"/>
           <p:cNvSpPr>
             <a:spLocks noGrp="1"/>
           </p:cNvSpPr>
@@ -2773,7 +2447,7 @@
     </p:spTree>
     <p:extLst>
       <p:ext uri="{BB962C8B-B14F-4D97-AF65-F5344CB8AC3E}">
-        <p14:creationId xmlns:p14="http://schemas.microsoft.com/office/powerpoint/2010/main" val="1108936307"/>
+        <p14:creationId xmlns:p14="http://schemas.microsoft.com/office/powerpoint/2010/main" val="3205629487"/>
       </p:ext>
     </p:extLst>
   </p:cSld>
@@ -2807,13 +2481,7 @@
       </p:grpSpPr>
       <p:sp>
         <p:nvSpPr>
-          <p:cNvPr id="2" name="标题占位符 1">
-            <a:extLst>
-              <a:ext uri="{FF2B5EF4-FFF2-40B4-BE49-F238E27FC236}">
-                <a16:creationId xmlns:a16="http://schemas.microsoft.com/office/drawing/2014/main" id="{040BAD00-4F46-B64E-A6E5-4A55B4CE8FD0}"/>
-              </a:ext>
-            </a:extLst>
-          </p:cNvPr>
+          <p:cNvPr id="2" name="Title Placeholder 1"/>
           <p:cNvSpPr>
             <a:spLocks noGrp="1"/>
           </p:cNvSpPr>
@@ -2823,8 +2491,8 @@
         </p:nvSpPr>
         <p:spPr>
           <a:xfrm>
-            <a:off x="838200" y="365125"/>
-            <a:ext cx="10515600" cy="1325563"/>
+            <a:off x="420737" y="210793"/>
+            <a:ext cx="5278339" cy="765267"/>
           </a:xfrm>
           <a:prstGeom prst="rect">
             <a:avLst/>
@@ -2840,18 +2508,13 @@
               <a:rPr lang="zh-CN" altLang="en-US"/>
               <a:t>单击此处编辑母版标题样式</a:t>
             </a:r>
-          </a:p>
-        </p:txBody>
-      </p:sp>
-      <p:sp>
-        <p:nvSpPr>
-          <p:cNvPr id="3" name="文本占位符 2">
-            <a:extLst>
-              <a:ext uri="{FF2B5EF4-FFF2-40B4-BE49-F238E27FC236}">
-                <a16:creationId xmlns:a16="http://schemas.microsoft.com/office/drawing/2014/main" id="{E340ABAB-7B63-DE0C-4CE2-7298BC47A146}"/>
-              </a:ext>
-            </a:extLst>
-          </p:cNvPr>
+            <a:endParaRPr lang="en-US" dirty="0"/>
+          </a:p>
+        </p:txBody>
+      </p:sp>
+      <p:sp>
+        <p:nvSpPr>
+          <p:cNvPr id="3" name="Text Placeholder 2"/>
           <p:cNvSpPr>
             <a:spLocks noGrp="1"/>
           </p:cNvSpPr>
@@ -2861,8 +2524,8 @@
         </p:nvSpPr>
         <p:spPr>
           <a:xfrm>
-            <a:off x="838200" y="1825625"/>
-            <a:ext cx="10515600" cy="4351338"/>
+            <a:off x="420737" y="1053960"/>
+            <a:ext cx="5278339" cy="2512092"/>
           </a:xfrm>
           <a:prstGeom prst="rect">
             <a:avLst/>
@@ -2907,18 +2570,13 @@
               <a:rPr lang="zh-CN" altLang="en-US"/>
               <a:t>五级</a:t>
             </a:r>
-          </a:p>
-        </p:txBody>
-      </p:sp>
-      <p:sp>
-        <p:nvSpPr>
-          <p:cNvPr id="4" name="日期占位符 3">
-            <a:extLst>
-              <a:ext uri="{FF2B5EF4-FFF2-40B4-BE49-F238E27FC236}">
-                <a16:creationId xmlns:a16="http://schemas.microsoft.com/office/drawing/2014/main" id="{77649710-EC7F-E2F9-6126-A009A5ADE215}"/>
-              </a:ext>
-            </a:extLst>
-          </p:cNvPr>
+            <a:endParaRPr lang="en-US" dirty="0"/>
+          </a:p>
+        </p:txBody>
+      </p:sp>
+      <p:sp>
+        <p:nvSpPr>
+          <p:cNvPr id="4" name="Date Placeholder 3"/>
           <p:cNvSpPr>
             <a:spLocks noGrp="1"/>
           </p:cNvSpPr>
@@ -2928,8 +2586,8 @@
         </p:nvSpPr>
         <p:spPr>
           <a:xfrm>
-            <a:off x="838200" y="6356350"/>
-            <a:ext cx="2743200" cy="365125"/>
+            <a:off x="420737" y="3669616"/>
+            <a:ext cx="1376958" cy="210792"/>
           </a:xfrm>
           <a:prstGeom prst="rect">
             <a:avLst/>
@@ -2939,7 +2597,7 @@
           <a:bodyPr vert="horz" lIns="91440" tIns="45720" rIns="91440" bIns="45720" rtlCol="0" anchor="ctr"/>
           <a:lstStyle>
             <a:lvl1pPr algn="l">
-              <a:defRPr sz="1200">
+              <a:defRPr sz="693">
                 <a:solidFill>
                   <a:schemeClr val="tx1">
                     <a:tint val="75000"/>
@@ -2951,7 +2609,7 @@
           <a:p>
             <a:fld id="{0D913D72-DA84-4294-82A6-28AD38AC8E6C}" type="datetimeFigureOut">
               <a:rPr lang="zh-CN" altLang="en-US" smtClean="0"/>
-              <a:t>2026/3/17</a:t>
+              <a:t>2026/3/25</a:t>
             </a:fld>
             <a:endParaRPr lang="zh-CN" altLang="en-US"/>
           </a:p>
@@ -2959,13 +2617,7 @@
       </p:sp>
       <p:sp>
         <p:nvSpPr>
-          <p:cNvPr id="5" name="页脚占位符 4">
-            <a:extLst>
-              <a:ext uri="{FF2B5EF4-FFF2-40B4-BE49-F238E27FC236}">
-                <a16:creationId xmlns:a16="http://schemas.microsoft.com/office/drawing/2014/main" id="{B9DB8392-0FA1-F12E-3CCC-8FA3709D9205}"/>
-              </a:ext>
-            </a:extLst>
-          </p:cNvPr>
+          <p:cNvPr id="5" name="Footer Placeholder 4"/>
           <p:cNvSpPr>
             <a:spLocks noGrp="1"/>
           </p:cNvSpPr>
@@ -2975,8 +2627,8 @@
         </p:nvSpPr>
         <p:spPr>
           <a:xfrm>
-            <a:off x="4038600" y="6356350"/>
-            <a:ext cx="4114800" cy="365125"/>
+            <a:off x="2027188" y="3669616"/>
+            <a:ext cx="2065437" cy="210792"/>
           </a:xfrm>
           <a:prstGeom prst="rect">
             <a:avLst/>
@@ -2986,7 +2638,7 @@
           <a:bodyPr vert="horz" lIns="91440" tIns="45720" rIns="91440" bIns="45720" rtlCol="0" anchor="ctr"/>
           <a:lstStyle>
             <a:lvl1pPr algn="ctr">
-              <a:defRPr sz="1200">
+              <a:defRPr sz="693">
                 <a:solidFill>
                   <a:schemeClr val="tx1">
                     <a:tint val="75000"/>
@@ -3002,13 +2654,7 @@
       </p:sp>
       <p:sp>
         <p:nvSpPr>
-          <p:cNvPr id="6" name="灯片编号占位符 5">
-            <a:extLst>
-              <a:ext uri="{FF2B5EF4-FFF2-40B4-BE49-F238E27FC236}">
-                <a16:creationId xmlns:a16="http://schemas.microsoft.com/office/drawing/2014/main" id="{7E3450A6-E20C-ACB8-C3EE-91D45B091E7D}"/>
-              </a:ext>
-            </a:extLst>
-          </p:cNvPr>
+          <p:cNvPr id="6" name="Slide Number Placeholder 5"/>
           <p:cNvSpPr>
             <a:spLocks noGrp="1"/>
           </p:cNvSpPr>
@@ -3018,8 +2664,8 @@
         </p:nvSpPr>
         <p:spPr>
           <a:xfrm>
-            <a:off x="8610600" y="6356350"/>
-            <a:ext cx="2743200" cy="365125"/>
+            <a:off x="4322118" y="3669616"/>
+            <a:ext cx="1376958" cy="210792"/>
           </a:xfrm>
           <a:prstGeom prst="rect">
             <a:avLst/>
@@ -3029,7 +2675,7 @@
           <a:bodyPr vert="horz" lIns="91440" tIns="45720" rIns="91440" bIns="45720" rtlCol="0" anchor="ctr"/>
           <a:lstStyle>
             <a:lvl1pPr algn="r">
-              <a:defRPr sz="1200">
+              <a:defRPr sz="693">
                 <a:solidFill>
                   <a:schemeClr val="tx1">
                     <a:tint val="75000"/>
@@ -3050,27 +2696,27 @@
     </p:spTree>
     <p:extLst>
       <p:ext uri="{BB962C8B-B14F-4D97-AF65-F5344CB8AC3E}">
-        <p14:creationId xmlns:p14="http://schemas.microsoft.com/office/powerpoint/2010/main" val="3418192302"/>
+        <p14:creationId xmlns:p14="http://schemas.microsoft.com/office/powerpoint/2010/main" val="1906642016"/>
       </p:ext>
     </p:extLst>
   </p:cSld>
   <p:clrMap bg1="lt1" tx1="dk1" bg2="lt2" tx2="dk2" accent1="accent1" accent2="accent2" accent3="accent3" accent4="accent4" accent5="accent5" accent6="accent6" hlink="hlink" folHlink="folHlink"/>
   <p:sldLayoutIdLst>
-    <p:sldLayoutId id="2147483649" r:id="rId1"/>
-    <p:sldLayoutId id="2147483650" r:id="rId2"/>
-    <p:sldLayoutId id="2147483651" r:id="rId3"/>
-    <p:sldLayoutId id="2147483652" r:id="rId4"/>
-    <p:sldLayoutId id="2147483653" r:id="rId5"/>
-    <p:sldLayoutId id="2147483654" r:id="rId6"/>
-    <p:sldLayoutId id="2147483655" r:id="rId7"/>
-    <p:sldLayoutId id="2147483656" r:id="rId8"/>
-    <p:sldLayoutId id="2147483657" r:id="rId9"/>
-    <p:sldLayoutId id="2147483658" r:id="rId10"/>
-    <p:sldLayoutId id="2147483659" r:id="rId11"/>
+    <p:sldLayoutId id="2147483685" r:id="rId1"/>
+    <p:sldLayoutId id="2147483686" r:id="rId2"/>
+    <p:sldLayoutId id="2147483687" r:id="rId3"/>
+    <p:sldLayoutId id="2147483688" r:id="rId4"/>
+    <p:sldLayoutId id="2147483689" r:id="rId5"/>
+    <p:sldLayoutId id="2147483690" r:id="rId6"/>
+    <p:sldLayoutId id="2147483691" r:id="rId7"/>
+    <p:sldLayoutId id="2147483692" r:id="rId8"/>
+    <p:sldLayoutId id="2147483693" r:id="rId9"/>
+    <p:sldLayoutId id="2147483694" r:id="rId10"/>
+    <p:sldLayoutId id="2147483695" r:id="rId11"/>
   </p:sldLayoutIdLst>
   <p:txStyles>
     <p:titleStyle>
-      <a:lvl1pPr algn="l" defTabSz="914400" rtl="0" eaLnBrk="1" latinLnBrk="0" hangingPunct="1">
+      <a:lvl1pPr algn="l" defTabSz="527883" rtl="0" eaLnBrk="1" latinLnBrk="0" hangingPunct="1">
         <a:lnSpc>
           <a:spcPct val="90000"/>
         </a:lnSpc>
@@ -3078,7 +2724,7 @@
           <a:spcPct val="0"/>
         </a:spcBef>
         <a:buNone/>
-        <a:defRPr sz="4400" kern="1200">
+        <a:defRPr sz="2540" kern="1200">
           <a:solidFill>
             <a:schemeClr val="tx1"/>
           </a:solidFill>
@@ -3089,16 +2735,16 @@
       </a:lvl1pPr>
     </p:titleStyle>
     <p:bodyStyle>
-      <a:lvl1pPr marL="228600" indent="-228600" algn="l" defTabSz="914400" rtl="0" eaLnBrk="1" latinLnBrk="0" hangingPunct="1">
+      <a:lvl1pPr marL="131971" indent="-131971" algn="l" defTabSz="527883" rtl="0" eaLnBrk="1" latinLnBrk="0" hangingPunct="1">
         <a:lnSpc>
           <a:spcPct val="90000"/>
         </a:lnSpc>
         <a:spcBef>
-          <a:spcPts val="1000"/>
+          <a:spcPts val="577"/>
         </a:spcBef>
         <a:buFont typeface="Arial" panose="020B0604020202020204" pitchFamily="34" charset="0"/>
         <a:buChar char="•"/>
-        <a:defRPr sz="2800" kern="1200">
+        <a:defRPr sz="1616" kern="1200">
           <a:solidFill>
             <a:schemeClr val="tx1"/>
           </a:solidFill>
@@ -3107,16 +2753,16 @@
           <a:cs typeface="+mn-cs"/>
         </a:defRPr>
       </a:lvl1pPr>
-      <a:lvl2pPr marL="685800" indent="-228600" algn="l" defTabSz="914400" rtl="0" eaLnBrk="1" latinLnBrk="0" hangingPunct="1">
+      <a:lvl2pPr marL="395912" indent="-131971" algn="l" defTabSz="527883" rtl="0" eaLnBrk="1" latinLnBrk="0" hangingPunct="1">
         <a:lnSpc>
           <a:spcPct val="90000"/>
         </a:lnSpc>
         <a:spcBef>
-          <a:spcPts val="500"/>
+          <a:spcPts val="289"/>
         </a:spcBef>
         <a:buFont typeface="Arial" panose="020B0604020202020204" pitchFamily="34" charset="0"/>
         <a:buChar char="•"/>
-        <a:defRPr sz="2400" kern="1200">
+        <a:defRPr sz="1386" kern="1200">
           <a:solidFill>
             <a:schemeClr val="tx1"/>
           </a:solidFill>
@@ -3125,16 +2771,16 @@
           <a:cs typeface="+mn-cs"/>
         </a:defRPr>
       </a:lvl2pPr>
-      <a:lvl3pPr marL="1143000" indent="-228600" algn="l" defTabSz="914400" rtl="0" eaLnBrk="1" latinLnBrk="0" hangingPunct="1">
+      <a:lvl3pPr marL="659854" indent="-131971" algn="l" defTabSz="527883" rtl="0" eaLnBrk="1" latinLnBrk="0" hangingPunct="1">
         <a:lnSpc>
           <a:spcPct val="90000"/>
         </a:lnSpc>
         <a:spcBef>
-          <a:spcPts val="500"/>
+          <a:spcPts val="289"/>
         </a:spcBef>
         <a:buFont typeface="Arial" panose="020B0604020202020204" pitchFamily="34" charset="0"/>
         <a:buChar char="•"/>
-        <a:defRPr sz="2000" kern="1200">
+        <a:defRPr sz="1155" kern="1200">
           <a:solidFill>
             <a:schemeClr val="tx1"/>
           </a:solidFill>
@@ -3143,16 +2789,16 @@
           <a:cs typeface="+mn-cs"/>
         </a:defRPr>
       </a:lvl3pPr>
-      <a:lvl4pPr marL="1600200" indent="-228600" algn="l" defTabSz="914400" rtl="0" eaLnBrk="1" latinLnBrk="0" hangingPunct="1">
+      <a:lvl4pPr marL="923795" indent="-131971" algn="l" defTabSz="527883" rtl="0" eaLnBrk="1" latinLnBrk="0" hangingPunct="1">
         <a:lnSpc>
           <a:spcPct val="90000"/>
         </a:lnSpc>
         <a:spcBef>
-          <a:spcPts val="500"/>
+          <a:spcPts val="289"/>
         </a:spcBef>
         <a:buFont typeface="Arial" panose="020B0604020202020204" pitchFamily="34" charset="0"/>
         <a:buChar char="•"/>
-        <a:defRPr sz="1800" kern="1200">
+        <a:defRPr sz="1039" kern="1200">
           <a:solidFill>
             <a:schemeClr val="tx1"/>
           </a:solidFill>
@@ -3161,16 +2807,16 @@
           <a:cs typeface="+mn-cs"/>
         </a:defRPr>
       </a:lvl4pPr>
-      <a:lvl5pPr marL="2057400" indent="-228600" algn="l" defTabSz="914400" rtl="0" eaLnBrk="1" latinLnBrk="0" hangingPunct="1">
+      <a:lvl5pPr marL="1187737" indent="-131971" algn="l" defTabSz="527883" rtl="0" eaLnBrk="1" latinLnBrk="0" hangingPunct="1">
         <a:lnSpc>
           <a:spcPct val="90000"/>
         </a:lnSpc>
         <a:spcBef>
-          <a:spcPts val="500"/>
+          <a:spcPts val="289"/>
         </a:spcBef>
         <a:buFont typeface="Arial" panose="020B0604020202020204" pitchFamily="34" charset="0"/>
         <a:buChar char="•"/>
-        <a:defRPr sz="1800" kern="1200">
+        <a:defRPr sz="1039" kern="1200">
           <a:solidFill>
             <a:schemeClr val="tx1"/>
           </a:solidFill>
@@ -3179,16 +2825,16 @@
           <a:cs typeface="+mn-cs"/>
         </a:defRPr>
       </a:lvl5pPr>
-      <a:lvl6pPr marL="2514600" indent="-228600" algn="l" defTabSz="914400" rtl="0" eaLnBrk="1" latinLnBrk="0" hangingPunct="1">
+      <a:lvl6pPr marL="1451679" indent="-131971" algn="l" defTabSz="527883" rtl="0" eaLnBrk="1" latinLnBrk="0" hangingPunct="1">
         <a:lnSpc>
           <a:spcPct val="90000"/>
         </a:lnSpc>
         <a:spcBef>
-          <a:spcPts val="500"/>
+          <a:spcPts val="289"/>
         </a:spcBef>
         <a:buFont typeface="Arial" panose="020B0604020202020204" pitchFamily="34" charset="0"/>
         <a:buChar char="•"/>
-        <a:defRPr sz="1800" kern="1200">
+        <a:defRPr sz="1039" kern="1200">
           <a:solidFill>
             <a:schemeClr val="tx1"/>
           </a:solidFill>
@@ -3197,16 +2843,16 @@
           <a:cs typeface="+mn-cs"/>
         </a:defRPr>
       </a:lvl6pPr>
-      <a:lvl7pPr marL="2971800" indent="-228600" algn="l" defTabSz="914400" rtl="0" eaLnBrk="1" latinLnBrk="0" hangingPunct="1">
+      <a:lvl7pPr marL="1715620" indent="-131971" algn="l" defTabSz="527883" rtl="0" eaLnBrk="1" latinLnBrk="0" hangingPunct="1">
         <a:lnSpc>
           <a:spcPct val="90000"/>
         </a:lnSpc>
         <a:spcBef>
-          <a:spcPts val="500"/>
+          <a:spcPts val="289"/>
         </a:spcBef>
         <a:buFont typeface="Arial" panose="020B0604020202020204" pitchFamily="34" charset="0"/>
         <a:buChar char="•"/>
-        <a:defRPr sz="1800" kern="1200">
+        <a:defRPr sz="1039" kern="1200">
           <a:solidFill>
             <a:schemeClr val="tx1"/>
           </a:solidFill>
@@ -3215,16 +2861,16 @@
           <a:cs typeface="+mn-cs"/>
         </a:defRPr>
       </a:lvl7pPr>
-      <a:lvl8pPr marL="3429000" indent="-228600" algn="l" defTabSz="914400" rtl="0" eaLnBrk="1" latinLnBrk="0" hangingPunct="1">
+      <a:lvl8pPr marL="1979562" indent="-131971" algn="l" defTabSz="527883" rtl="0" eaLnBrk="1" latinLnBrk="0" hangingPunct="1">
         <a:lnSpc>
           <a:spcPct val="90000"/>
         </a:lnSpc>
         <a:spcBef>
-          <a:spcPts val="500"/>
+          <a:spcPts val="289"/>
         </a:spcBef>
         <a:buFont typeface="Arial" panose="020B0604020202020204" pitchFamily="34" charset="0"/>
         <a:buChar char="•"/>
-        <a:defRPr sz="1800" kern="1200">
+        <a:defRPr sz="1039" kern="1200">
           <a:solidFill>
             <a:schemeClr val="tx1"/>
           </a:solidFill>
@@ -3233,16 +2879,16 @@
           <a:cs typeface="+mn-cs"/>
         </a:defRPr>
       </a:lvl8pPr>
-      <a:lvl9pPr marL="3886200" indent="-228600" algn="l" defTabSz="914400" rtl="0" eaLnBrk="1" latinLnBrk="0" hangingPunct="1">
+      <a:lvl9pPr marL="2243503" indent="-131971" algn="l" defTabSz="527883" rtl="0" eaLnBrk="1" latinLnBrk="0" hangingPunct="1">
         <a:lnSpc>
           <a:spcPct val="90000"/>
         </a:lnSpc>
         <a:spcBef>
-          <a:spcPts val="500"/>
+          <a:spcPts val="289"/>
         </a:spcBef>
         <a:buFont typeface="Arial" panose="020B0604020202020204" pitchFamily="34" charset="0"/>
         <a:buChar char="•"/>
-        <a:defRPr sz="1800" kern="1200">
+        <a:defRPr sz="1039" kern="1200">
           <a:solidFill>
             <a:schemeClr val="tx1"/>
           </a:solidFill>
@@ -3254,10 +2900,10 @@
     </p:bodyStyle>
     <p:otherStyle>
       <a:defPPr>
-        <a:defRPr lang="zh-CN"/>
+        <a:defRPr lang="en-US"/>
       </a:defPPr>
-      <a:lvl1pPr marL="0" algn="l" defTabSz="914400" rtl="0" eaLnBrk="1" latinLnBrk="0" hangingPunct="1">
-        <a:defRPr sz="1800" kern="1200">
+      <a:lvl1pPr marL="0" algn="l" defTabSz="527883" rtl="0" eaLnBrk="1" latinLnBrk="0" hangingPunct="1">
+        <a:defRPr sz="1039" kern="1200">
           <a:solidFill>
             <a:schemeClr val="tx1"/>
           </a:solidFill>
@@ -3266,8 +2912,8 @@
           <a:cs typeface="+mn-cs"/>
         </a:defRPr>
       </a:lvl1pPr>
-      <a:lvl2pPr marL="457200" algn="l" defTabSz="914400" rtl="0" eaLnBrk="1" latinLnBrk="0" hangingPunct="1">
-        <a:defRPr sz="1800" kern="1200">
+      <a:lvl2pPr marL="263942" algn="l" defTabSz="527883" rtl="0" eaLnBrk="1" latinLnBrk="0" hangingPunct="1">
+        <a:defRPr sz="1039" kern="1200">
           <a:solidFill>
             <a:schemeClr val="tx1"/>
           </a:solidFill>
@@ -3276,8 +2922,8 @@
           <a:cs typeface="+mn-cs"/>
         </a:defRPr>
       </a:lvl2pPr>
-      <a:lvl3pPr marL="914400" algn="l" defTabSz="914400" rtl="0" eaLnBrk="1" latinLnBrk="0" hangingPunct="1">
-        <a:defRPr sz="1800" kern="1200">
+      <a:lvl3pPr marL="527883" algn="l" defTabSz="527883" rtl="0" eaLnBrk="1" latinLnBrk="0" hangingPunct="1">
+        <a:defRPr sz="1039" kern="1200">
           <a:solidFill>
             <a:schemeClr val="tx1"/>
           </a:solidFill>
@@ -3286,8 +2932,8 @@
           <a:cs typeface="+mn-cs"/>
         </a:defRPr>
       </a:lvl3pPr>
-      <a:lvl4pPr marL="1371600" algn="l" defTabSz="914400" rtl="0" eaLnBrk="1" latinLnBrk="0" hangingPunct="1">
-        <a:defRPr sz="1800" kern="1200">
+      <a:lvl4pPr marL="791825" algn="l" defTabSz="527883" rtl="0" eaLnBrk="1" latinLnBrk="0" hangingPunct="1">
+        <a:defRPr sz="1039" kern="1200">
           <a:solidFill>
             <a:schemeClr val="tx1"/>
           </a:solidFill>
@@ -3296,8 +2942,8 @@
           <a:cs typeface="+mn-cs"/>
         </a:defRPr>
       </a:lvl4pPr>
-      <a:lvl5pPr marL="1828800" algn="l" defTabSz="914400" rtl="0" eaLnBrk="1" latinLnBrk="0" hangingPunct="1">
-        <a:defRPr sz="1800" kern="1200">
+      <a:lvl5pPr marL="1055766" algn="l" defTabSz="527883" rtl="0" eaLnBrk="1" latinLnBrk="0" hangingPunct="1">
+        <a:defRPr sz="1039" kern="1200">
           <a:solidFill>
             <a:schemeClr val="tx1"/>
           </a:solidFill>
@@ -3306,8 +2952,8 @@
           <a:cs typeface="+mn-cs"/>
         </a:defRPr>
       </a:lvl5pPr>
-      <a:lvl6pPr marL="2286000" algn="l" defTabSz="914400" rtl="0" eaLnBrk="1" latinLnBrk="0" hangingPunct="1">
-        <a:defRPr sz="1800" kern="1200">
+      <a:lvl6pPr marL="1319708" algn="l" defTabSz="527883" rtl="0" eaLnBrk="1" latinLnBrk="0" hangingPunct="1">
+        <a:defRPr sz="1039" kern="1200">
           <a:solidFill>
             <a:schemeClr val="tx1"/>
           </a:solidFill>
@@ -3316,8 +2962,8 @@
           <a:cs typeface="+mn-cs"/>
         </a:defRPr>
       </a:lvl6pPr>
-      <a:lvl7pPr marL="2743200" algn="l" defTabSz="914400" rtl="0" eaLnBrk="1" latinLnBrk="0" hangingPunct="1">
-        <a:defRPr sz="1800" kern="1200">
+      <a:lvl7pPr marL="1583649" algn="l" defTabSz="527883" rtl="0" eaLnBrk="1" latinLnBrk="0" hangingPunct="1">
+        <a:defRPr sz="1039" kern="1200">
           <a:solidFill>
             <a:schemeClr val="tx1"/>
           </a:solidFill>
@@ -3326,8 +2972,8 @@
           <a:cs typeface="+mn-cs"/>
         </a:defRPr>
       </a:lvl7pPr>
-      <a:lvl8pPr marL="3200400" algn="l" defTabSz="914400" rtl="0" eaLnBrk="1" latinLnBrk="0" hangingPunct="1">
-        <a:defRPr sz="1800" kern="1200">
+      <a:lvl8pPr marL="1847591" algn="l" defTabSz="527883" rtl="0" eaLnBrk="1" latinLnBrk="0" hangingPunct="1">
+        <a:defRPr sz="1039" kern="1200">
           <a:solidFill>
             <a:schemeClr val="tx1"/>
           </a:solidFill>
@@ -3336,8 +2982,8 @@
           <a:cs typeface="+mn-cs"/>
         </a:defRPr>
       </a:lvl8pPr>
-      <a:lvl9pPr marL="3657600" algn="l" defTabSz="914400" rtl="0" eaLnBrk="1" latinLnBrk="0" hangingPunct="1">
-        <a:defRPr sz="1800" kern="1200">
+      <a:lvl9pPr marL="2111532" algn="l" defTabSz="527883" rtl="0" eaLnBrk="1" latinLnBrk="0" hangingPunct="1">
+        <a:defRPr sz="1039" kern="1200">
           <a:solidFill>
             <a:schemeClr val="tx1"/>
           </a:solidFill>
@@ -3370,10 +3016,10 @@
       </p:grpSpPr>
       <p:grpSp>
         <p:nvGrpSpPr>
-          <p:cNvPr id="48" name="组合 47">
+          <p:cNvPr id="18" name="组合 17">
             <a:extLst>
               <a:ext uri="{FF2B5EF4-FFF2-40B4-BE49-F238E27FC236}">
-                <a16:creationId xmlns:a16="http://schemas.microsoft.com/office/drawing/2014/main" id="{0254121B-6785-C5B3-24D4-7FD321F70097}"/>
+                <a16:creationId xmlns:a16="http://schemas.microsoft.com/office/drawing/2014/main" id="{35873DA8-C286-B6DD-1D17-640772C883CE}"/>
               </a:ext>
             </a:extLst>
           </p:cNvPr>
@@ -3382,10 +3028,10 @@
         </p:nvGrpSpPr>
         <p:grpSpPr>
           <a:xfrm>
-            <a:off x="124023" y="1027478"/>
-            <a:ext cx="5934403" cy="3985847"/>
-            <a:chOff x="124023" y="1027478"/>
-            <a:chExt cx="5934403" cy="3985847"/>
+            <a:off x="-32921" y="-13312"/>
+            <a:ext cx="6217817" cy="3985847"/>
+            <a:chOff x="-32921" y="-13312"/>
+            <a:chExt cx="6217817" cy="3985847"/>
           </a:xfrm>
         </p:grpSpPr>
         <p:pic>
@@ -3427,7 +3073,7 @@
           </p:blipFill>
           <p:spPr>
             <a:xfrm>
-              <a:off x="979931" y="1027478"/>
+              <a:off x="913398" y="-13312"/>
               <a:ext cx="4105657" cy="3985847"/>
             </a:xfrm>
             <a:prstGeom prst="rect">
@@ -3449,8 +3095,8 @@
           </p:nvSpPr>
           <p:spPr>
             <a:xfrm>
-              <a:off x="226405" y="3029603"/>
-              <a:ext cx="806822" cy="384459"/>
+              <a:off x="49661" y="1899766"/>
+              <a:ext cx="917033" cy="468613"/>
             </a:xfrm>
             <a:prstGeom prst="wedgeRectCallout">
               <a:avLst>
@@ -3483,7 +3129,7 @@
             <a:lstStyle/>
             <a:p>
               <a:pPr algn="ctr"/>
-              <a:endParaRPr lang="zh-CN" altLang="en-US"/>
+              <a:endParaRPr lang="zh-CN" altLang="en-US" sz="1600"/>
             </a:p>
           </p:txBody>
         </p:sp>
@@ -3501,8 +3147,8 @@
           </p:nvSpPr>
           <p:spPr>
             <a:xfrm>
-              <a:off x="132079" y="2990999"/>
-              <a:ext cx="1000760" cy="461665"/>
+              <a:off x="-1439" y="1834054"/>
+              <a:ext cx="1000760" cy="584775"/>
             </a:xfrm>
             <a:prstGeom prst="rect">
               <a:avLst/>
@@ -3517,13 +3163,13 @@
             <a:p>
               <a:pPr algn="ctr"/>
               <a:r>
-                <a:rPr lang="zh-CN" altLang="en-US" sz="1200" dirty="0">
+                <a:rPr lang="zh-CN" altLang="en-US" sz="1600" dirty="0">
                   <a:latin typeface="宋体" panose="02010600030101010101" pitchFamily="2" charset="-122"/>
                   <a:ea typeface="宋体" panose="02010600030101010101" pitchFamily="2" charset="-122"/>
                 </a:rPr>
                 <a:t>电源与</a:t>
               </a:r>
-              <a:endParaRPr lang="en-US" altLang="zh-CN" sz="1200" dirty="0">
+              <a:endParaRPr lang="en-US" altLang="zh-CN" sz="1600" dirty="0">
                 <a:latin typeface="宋体" panose="02010600030101010101" pitchFamily="2" charset="-122"/>
                 <a:ea typeface="宋体" panose="02010600030101010101" pitchFamily="2" charset="-122"/>
               </a:endParaRPr>
@@ -3531,7 +3177,7 @@
             <a:p>
               <a:pPr algn="ctr"/>
               <a:r>
-                <a:rPr lang="zh-CN" altLang="en-US" sz="1200" dirty="0">
+                <a:rPr lang="zh-CN" altLang="en-US" sz="1600" dirty="0">
                   <a:latin typeface="宋体" panose="02010600030101010101" pitchFamily="2" charset="-122"/>
                   <a:ea typeface="宋体" panose="02010600030101010101" pitchFamily="2" charset="-122"/>
                 </a:rPr>
@@ -3554,8 +3200,8 @@
           </p:nvSpPr>
           <p:spPr>
             <a:xfrm>
-              <a:off x="231692" y="4110500"/>
-              <a:ext cx="801535" cy="384459"/>
+              <a:off x="48521" y="3069710"/>
+              <a:ext cx="918174" cy="479940"/>
             </a:xfrm>
             <a:prstGeom prst="wedgeRectCallout">
               <a:avLst>
@@ -3588,7 +3234,7 @@
             <a:lstStyle/>
             <a:p>
               <a:pPr algn="ctr"/>
-              <a:endParaRPr lang="zh-CN" altLang="en-US"/>
+              <a:endParaRPr lang="zh-CN" altLang="en-US" sz="1600"/>
             </a:p>
           </p:txBody>
         </p:sp>
@@ -3606,8 +3252,8 @@
           </p:nvSpPr>
           <p:spPr>
             <a:xfrm>
-              <a:off x="124023" y="4066096"/>
-              <a:ext cx="1000760" cy="461665"/>
+              <a:off x="-7968" y="3023827"/>
+              <a:ext cx="1000760" cy="584775"/>
             </a:xfrm>
             <a:prstGeom prst="rect">
               <a:avLst/>
@@ -3622,13 +3268,13 @@
             <a:p>
               <a:pPr algn="ctr"/>
               <a:r>
-                <a:rPr lang="zh-CN" altLang="en-US" sz="1200" dirty="0">
+                <a:rPr lang="zh-CN" altLang="en-US" sz="1600" dirty="0">
                   <a:latin typeface="宋体" panose="02010600030101010101" pitchFamily="2" charset="-122"/>
                   <a:ea typeface="宋体" panose="02010600030101010101" pitchFamily="2" charset="-122"/>
                 </a:rPr>
                 <a:t>三相逆变</a:t>
               </a:r>
-              <a:endParaRPr lang="en-US" altLang="zh-CN" sz="1200" dirty="0">
+              <a:endParaRPr lang="en-US" altLang="zh-CN" sz="1600" dirty="0">
                 <a:latin typeface="宋体" panose="02010600030101010101" pitchFamily="2" charset="-122"/>
                 <a:ea typeface="宋体" panose="02010600030101010101" pitchFamily="2" charset="-122"/>
               </a:endParaRPr>
@@ -3636,7 +3282,7 @@
             <a:p>
               <a:pPr algn="ctr"/>
               <a:r>
-                <a:rPr lang="zh-CN" altLang="en-US" sz="1200" dirty="0">
+                <a:rPr lang="zh-CN" altLang="en-US" sz="1600" dirty="0">
                   <a:latin typeface="宋体" panose="02010600030101010101" pitchFamily="2" charset="-122"/>
                   <a:ea typeface="宋体" panose="02010600030101010101" pitchFamily="2" charset="-122"/>
                 </a:rPr>
@@ -3659,8 +3305,8 @@
           </p:nvSpPr>
           <p:spPr>
             <a:xfrm>
-              <a:off x="227013" y="3655236"/>
-              <a:ext cx="807355" cy="259647"/>
+              <a:off x="49662" y="2614446"/>
+              <a:ext cx="918174" cy="259647"/>
             </a:xfrm>
             <a:prstGeom prst="wedgeRectCallout">
               <a:avLst>
@@ -3693,7 +3339,7 @@
             <a:lstStyle/>
             <a:p>
               <a:pPr algn="ctr"/>
-              <a:endParaRPr lang="zh-CN" altLang="en-US"/>
+              <a:endParaRPr lang="zh-CN" altLang="en-US" sz="1600"/>
             </a:p>
           </p:txBody>
         </p:sp>
@@ -3711,8 +3357,8 @@
           </p:nvSpPr>
           <p:spPr>
             <a:xfrm>
-              <a:off x="213697" y="3646559"/>
-              <a:ext cx="907796" cy="276999"/>
+              <a:off x="-32921" y="2574992"/>
+              <a:ext cx="1107778" cy="338554"/>
             </a:xfrm>
             <a:prstGeom prst="rect">
               <a:avLst/>
@@ -3726,7 +3372,7 @@
             <a:lstStyle/>
             <a:p>
               <a:r>
-                <a:rPr lang="zh-CN" altLang="en-US" sz="1200" dirty="0">
+                <a:rPr lang="zh-CN" altLang="en-US" sz="1600" dirty="0">
                   <a:latin typeface="宋体" panose="02010600030101010101" pitchFamily="2" charset="-122"/>
                   <a:ea typeface="宋体" panose="02010600030101010101" pitchFamily="2" charset="-122"/>
                 </a:rPr>
@@ -3749,8 +3395,8 @@
           </p:nvSpPr>
           <p:spPr>
             <a:xfrm>
-              <a:off x="227013" y="1680156"/>
-              <a:ext cx="807355" cy="259647"/>
+              <a:off x="58900" y="639366"/>
+              <a:ext cx="908936" cy="259647"/>
             </a:xfrm>
             <a:prstGeom prst="wedgeRectCallout">
               <a:avLst>
@@ -3781,59 +3427,7 @@
             <a:lstStyle/>
             <a:p>
               <a:pPr algn="ctr"/>
-              <a:endParaRPr lang="zh-CN" altLang="en-US"/>
-            </a:p>
-          </p:txBody>
-        </p:sp>
-        <p:sp>
-          <p:nvSpPr>
-            <p:cNvPr id="2" name="对话气泡: 矩形 1">
-              <a:extLst>
-                <a:ext uri="{FF2B5EF4-FFF2-40B4-BE49-F238E27FC236}">
-                  <a16:creationId xmlns:a16="http://schemas.microsoft.com/office/drawing/2014/main" id="{6926EB16-71BA-06B9-FA30-BD06F144EB6A}"/>
-                </a:ext>
-              </a:extLst>
-            </p:cNvPr>
-            <p:cNvSpPr/>
-            <p:nvPr/>
-          </p:nvSpPr>
-          <p:spPr>
-            <a:xfrm flipH="1">
-              <a:off x="5016903" y="1260779"/>
-              <a:ext cx="871555" cy="259647"/>
-            </a:xfrm>
-            <a:prstGeom prst="wedgeRectCallout">
-              <a:avLst>
-                <a:gd name="adj1" fmla="val 192968"/>
-                <a:gd name="adj2" fmla="val -27498"/>
-              </a:avLst>
-            </a:prstGeom>
-            <a:solidFill>
-              <a:schemeClr val="bg1"/>
-            </a:solidFill>
-          </p:spPr>
-          <p:style>
-            <a:lnRef idx="2">
-              <a:schemeClr val="accent1">
-                <a:shade val="15000"/>
-              </a:schemeClr>
-            </a:lnRef>
-            <a:fillRef idx="1">
-              <a:schemeClr val="accent1"/>
-            </a:fillRef>
-            <a:effectRef idx="0">
-              <a:schemeClr val="accent1"/>
-            </a:effectRef>
-            <a:fontRef idx="minor">
-              <a:schemeClr val="lt1"/>
-            </a:fontRef>
-          </p:style>
-          <p:txBody>
-            <a:bodyPr rtlCol="0" anchor="ctr"/>
-            <a:lstStyle/>
-            <a:p>
-              <a:pPr algn="ctr"/>
-              <a:endParaRPr lang="zh-CN" altLang="en-US"/>
+              <a:endParaRPr lang="zh-CN" altLang="en-US" sz="1600"/>
             </a:p>
           </p:txBody>
         </p:sp>
@@ -3851,8 +3445,8 @@
           </p:nvSpPr>
           <p:spPr>
             <a:xfrm flipH="1">
-              <a:off x="5031150" y="1687268"/>
-              <a:ext cx="848949" cy="259647"/>
+              <a:off x="4964611" y="864236"/>
+              <a:ext cx="948300" cy="259647"/>
             </a:xfrm>
             <a:prstGeom prst="wedgeRectCallout">
               <a:avLst>
@@ -3885,7 +3479,7 @@
             <a:lstStyle/>
             <a:p>
               <a:pPr algn="ctr"/>
-              <a:endParaRPr lang="zh-CN" altLang="en-US"/>
+              <a:endParaRPr lang="zh-CN" altLang="en-US" sz="1600"/>
             </a:p>
           </p:txBody>
         </p:sp>
@@ -3903,8 +3497,8 @@
           </p:nvSpPr>
           <p:spPr>
             <a:xfrm flipH="1">
-              <a:off x="5031149" y="2373404"/>
-              <a:ext cx="848948" cy="259647"/>
+              <a:off x="4964615" y="1332614"/>
+              <a:ext cx="948300" cy="259647"/>
             </a:xfrm>
             <a:prstGeom prst="wedgeRectCallout">
               <a:avLst>
@@ -3937,7 +3531,7 @@
             <a:lstStyle/>
             <a:p>
               <a:pPr algn="ctr"/>
-              <a:endParaRPr lang="zh-CN" altLang="en-US"/>
+              <a:endParaRPr lang="zh-CN" altLang="en-US" sz="1600"/>
             </a:p>
           </p:txBody>
         </p:sp>
@@ -3955,8 +3549,8 @@
           </p:nvSpPr>
           <p:spPr>
             <a:xfrm flipH="1">
-              <a:off x="5041530" y="3026763"/>
-              <a:ext cx="857308" cy="384459"/>
+              <a:off x="4974992" y="1960190"/>
+              <a:ext cx="965429" cy="465773"/>
             </a:xfrm>
             <a:prstGeom prst="wedgeRectCallout">
               <a:avLst>
@@ -3989,7 +3583,7 @@
             <a:lstStyle/>
             <a:p>
               <a:pPr algn="ctr"/>
-              <a:endParaRPr lang="zh-CN" altLang="en-US"/>
+              <a:endParaRPr lang="zh-CN" altLang="en-US" sz="1600"/>
             </a:p>
           </p:txBody>
         </p:sp>
@@ -4007,8 +3601,8 @@
           </p:nvSpPr>
           <p:spPr>
             <a:xfrm flipH="1">
-              <a:off x="5031148" y="4097358"/>
-              <a:ext cx="848946" cy="259647"/>
+              <a:off x="4964613" y="3056568"/>
+              <a:ext cx="948298" cy="259647"/>
             </a:xfrm>
             <a:prstGeom prst="wedgeRectCallout">
               <a:avLst>
@@ -4041,7 +3635,7 @@
             <a:lstStyle/>
             <a:p>
               <a:pPr algn="ctr"/>
-              <a:endParaRPr lang="zh-CN" altLang="en-US"/>
+              <a:endParaRPr lang="zh-CN" altLang="en-US" sz="1600"/>
             </a:p>
           </p:txBody>
         </p:sp>
@@ -4059,8 +3653,8 @@
           </p:nvSpPr>
           <p:spPr>
             <a:xfrm>
-              <a:off x="227013" y="1662804"/>
-              <a:ext cx="907796" cy="276999"/>
+              <a:off x="-16454" y="596947"/>
+              <a:ext cx="1213710" cy="338554"/>
             </a:xfrm>
             <a:prstGeom prst="rect">
               <a:avLst/>
@@ -4074,49 +3668,11 @@
             <a:lstStyle/>
             <a:p>
               <a:r>
-                <a:rPr lang="zh-CN" altLang="en-US" sz="1200" dirty="0">
+                <a:rPr lang="zh-CN" altLang="en-US" sz="1600" dirty="0">
                   <a:latin typeface="宋体" panose="02010600030101010101" pitchFamily="2" charset="-122"/>
                   <a:ea typeface="宋体" panose="02010600030101010101" pitchFamily="2" charset="-122"/>
                 </a:rPr>
                 <a:t>驱动芯片</a:t>
-              </a:r>
-            </a:p>
-          </p:txBody>
-        </p:sp>
-        <p:sp>
-          <p:nvSpPr>
-            <p:cNvPr id="21" name="文本框 20">
-              <a:extLst>
-                <a:ext uri="{FF2B5EF4-FFF2-40B4-BE49-F238E27FC236}">
-                  <a16:creationId xmlns:a16="http://schemas.microsoft.com/office/drawing/2014/main" id="{315322B1-A186-573C-F479-389251BFD4D0}"/>
-                </a:ext>
-              </a:extLst>
-            </p:cNvPr>
-            <p:cNvSpPr txBox="1"/>
-            <p:nvPr/>
-          </p:nvSpPr>
-          <p:spPr>
-            <a:xfrm>
-              <a:off x="4984514" y="1237464"/>
-              <a:ext cx="1073912" cy="276999"/>
-            </a:xfrm>
-            <a:prstGeom prst="rect">
-              <a:avLst/>
-            </a:prstGeom>
-            <a:noFill/>
-          </p:spPr>
-          <p:txBody>
-            <a:bodyPr wrap="square" rtlCol="0">
-              <a:spAutoFit/>
-            </a:bodyPr>
-            <a:lstStyle/>
-            <a:p>
-              <a:r>
-                <a:rPr lang="zh-CN" altLang="en-US" sz="1200" dirty="0">
-                  <a:latin typeface="宋体" panose="02010600030101010101" pitchFamily="2" charset="-122"/>
-                  <a:ea typeface="宋体" panose="02010600030101010101" pitchFamily="2" charset="-122"/>
-                </a:rPr>
-                <a:t>编码器接口</a:t>
               </a:r>
             </a:p>
           </p:txBody>
@@ -4135,8 +3691,8 @@
           </p:nvSpPr>
           <p:spPr>
             <a:xfrm>
-              <a:off x="5033700" y="2364727"/>
-              <a:ext cx="907796" cy="276999"/>
+              <a:off x="4974992" y="1293160"/>
+              <a:ext cx="1209904" cy="338554"/>
             </a:xfrm>
             <a:prstGeom prst="rect">
               <a:avLst/>
@@ -4150,7 +3706,7 @@
             <a:lstStyle/>
             <a:p>
               <a:r>
-                <a:rPr lang="zh-CN" altLang="en-US" sz="1200" dirty="0">
+                <a:rPr lang="zh-CN" altLang="en-US" sz="1600" dirty="0">
                   <a:latin typeface="宋体" panose="02010600030101010101" pitchFamily="2" charset="-122"/>
                   <a:ea typeface="宋体" panose="02010600030101010101" pitchFamily="2" charset="-122"/>
                 </a:rPr>
@@ -4173,8 +3729,8 @@
           </p:nvSpPr>
           <p:spPr>
             <a:xfrm>
-              <a:off x="5097611" y="4078352"/>
-              <a:ext cx="907796" cy="276999"/>
+              <a:off x="5032629" y="3004287"/>
+              <a:ext cx="907796" cy="338554"/>
             </a:xfrm>
             <a:prstGeom prst="rect">
               <a:avLst/>
@@ -4188,14 +3744,14 @@
             <a:lstStyle/>
             <a:p>
               <a:r>
-                <a:rPr lang="en-US" altLang="zh-CN" sz="1200" dirty="0">
+                <a:rPr lang="en-US" altLang="zh-CN" sz="1600" dirty="0">
                   <a:latin typeface="宋体" panose="02010600030101010101" pitchFamily="2" charset="-122"/>
                   <a:ea typeface="宋体" panose="02010600030101010101" pitchFamily="2" charset="-122"/>
                 </a:rPr>
                 <a:t>NTC</a:t>
               </a:r>
               <a:r>
-                <a:rPr lang="zh-CN" altLang="en-US" sz="1200" dirty="0">
+                <a:rPr lang="zh-CN" altLang="en-US" sz="1600" dirty="0">
                   <a:latin typeface="宋体" panose="02010600030101010101" pitchFamily="2" charset="-122"/>
                   <a:ea typeface="宋体" panose="02010600030101010101" pitchFamily="2" charset="-122"/>
                 </a:rPr>
@@ -4218,8 +3774,8 @@
           </p:nvSpPr>
           <p:spPr>
             <a:xfrm>
-              <a:off x="5040967" y="1687268"/>
-              <a:ext cx="907796" cy="276999"/>
+              <a:off x="4964611" y="829401"/>
+              <a:ext cx="1144817" cy="338554"/>
             </a:xfrm>
             <a:prstGeom prst="rect">
               <a:avLst/>
@@ -4233,7 +3789,7 @@
             <a:lstStyle/>
             <a:p>
               <a:r>
-                <a:rPr lang="en-US" altLang="zh-CN" sz="1200" dirty="0">
+                <a:rPr lang="en-US" altLang="zh-CN" sz="1600" dirty="0">
                   <a:latin typeface="Times New Roman" panose="02020603050405020304" pitchFamily="18" charset="0"/>
                   <a:ea typeface="宋体" panose="02010600030101010101" pitchFamily="2" charset="-122"/>
                   <a:cs typeface="Times New Roman" panose="02020603050405020304" pitchFamily="18" charset="0"/>
@@ -4241,7 +3797,7 @@
                 <a:t>USB</a:t>
               </a:r>
               <a:r>
-                <a:rPr lang="zh-CN" altLang="en-US" sz="1200" dirty="0">
+                <a:rPr lang="zh-CN" altLang="en-US" sz="1600" dirty="0">
                   <a:latin typeface="宋体" panose="02010600030101010101" pitchFamily="2" charset="-122"/>
                   <a:ea typeface="宋体" panose="02010600030101010101" pitchFamily="2" charset="-122"/>
                 </a:rPr>
@@ -4264,8 +3820,8 @@
           </p:nvSpPr>
           <p:spPr>
             <a:xfrm>
-              <a:off x="225872" y="1260778"/>
-              <a:ext cx="807355" cy="259647"/>
+              <a:off x="58899" y="219988"/>
+              <a:ext cx="907795" cy="259647"/>
             </a:xfrm>
             <a:prstGeom prst="wedgeRectCallout">
               <a:avLst>
@@ -4296,7 +3852,7 @@
             <a:lstStyle/>
             <a:p>
               <a:pPr algn="ctr"/>
-              <a:endParaRPr lang="zh-CN" altLang="en-US"/>
+              <a:endParaRPr lang="zh-CN" altLang="en-US" sz="1600"/>
             </a:p>
           </p:txBody>
         </p:sp>
@@ -4314,8 +3870,8 @@
           </p:nvSpPr>
           <p:spPr>
             <a:xfrm>
-              <a:off x="227013" y="1252101"/>
-              <a:ext cx="907796" cy="276999"/>
+              <a:off x="-16454" y="180534"/>
+              <a:ext cx="1081263" cy="338554"/>
             </a:xfrm>
             <a:prstGeom prst="rect">
               <a:avLst/>
@@ -4329,7 +3885,7 @@
             <a:lstStyle/>
             <a:p>
               <a:r>
-                <a:rPr lang="zh-CN" altLang="en-US" sz="1200" dirty="0">
+                <a:rPr lang="zh-CN" altLang="en-US" sz="1600" dirty="0">
                   <a:latin typeface="宋体" panose="02010600030101010101" pitchFamily="2" charset="-122"/>
                   <a:ea typeface="宋体" panose="02010600030101010101" pitchFamily="2" charset="-122"/>
                 </a:rPr>
@@ -4352,8 +3908,8 @@
           </p:nvSpPr>
           <p:spPr>
             <a:xfrm>
-              <a:off x="4952300" y="2982267"/>
-              <a:ext cx="1000760" cy="461665"/>
+              <a:off x="4974992" y="1899766"/>
+              <a:ext cx="1000760" cy="584775"/>
             </a:xfrm>
             <a:prstGeom prst="rect">
               <a:avLst/>
@@ -4368,13 +3924,13 @@
             <a:p>
               <a:pPr algn="ctr"/>
               <a:r>
-                <a:rPr lang="zh-CN" altLang="en-US" sz="1200" dirty="0">
+                <a:rPr lang="zh-CN" altLang="en-US" sz="1600" dirty="0">
                   <a:latin typeface="宋体" panose="02010600030101010101" pitchFamily="2" charset="-122"/>
                   <a:ea typeface="宋体" panose="02010600030101010101" pitchFamily="2" charset="-122"/>
                 </a:rPr>
                 <a:t>电源与</a:t>
               </a:r>
-              <a:endParaRPr lang="en-US" altLang="zh-CN" sz="1200" dirty="0">
+              <a:endParaRPr lang="en-US" altLang="zh-CN" sz="1600" dirty="0">
                 <a:latin typeface="宋体" panose="02010600030101010101" pitchFamily="2" charset="-122"/>
                 <a:ea typeface="宋体" panose="02010600030101010101" pitchFamily="2" charset="-122"/>
               </a:endParaRPr>
@@ -4382,11 +3938,116 @@
             <a:p>
               <a:pPr algn="ctr"/>
               <a:r>
-                <a:rPr lang="zh-CN" altLang="en-US" sz="1200" dirty="0">
+                <a:rPr lang="zh-CN" altLang="en-US" sz="1600" dirty="0">
                   <a:latin typeface="宋体" panose="02010600030101010101" pitchFamily="2" charset="-122"/>
                   <a:ea typeface="宋体" panose="02010600030101010101" pitchFamily="2" charset="-122"/>
                 </a:rPr>
                 <a:t>通信接口</a:t>
+              </a:r>
+            </a:p>
+          </p:txBody>
+        </p:sp>
+        <p:sp>
+          <p:nvSpPr>
+            <p:cNvPr id="9" name="对话气泡: 矩形 8">
+              <a:extLst>
+                <a:ext uri="{FF2B5EF4-FFF2-40B4-BE49-F238E27FC236}">
+                  <a16:creationId xmlns:a16="http://schemas.microsoft.com/office/drawing/2014/main" id="{27CA94F8-406B-5CE9-2908-A458DA401C66}"/>
+                </a:ext>
+              </a:extLst>
+            </p:cNvPr>
+            <p:cNvSpPr/>
+            <p:nvPr/>
+          </p:nvSpPr>
+          <p:spPr>
+            <a:xfrm flipH="1">
+              <a:off x="4908124" y="233631"/>
+              <a:ext cx="965429" cy="465773"/>
+            </a:xfrm>
+            <a:prstGeom prst="wedgeRectCallout">
+              <a:avLst>
+                <a:gd name="adj1" fmla="val 174394"/>
+                <a:gd name="adj2" fmla="val -28437"/>
+              </a:avLst>
+            </a:prstGeom>
+            <a:solidFill>
+              <a:schemeClr val="bg1"/>
+            </a:solidFill>
+          </p:spPr>
+          <p:style>
+            <a:lnRef idx="2">
+              <a:schemeClr val="accent1">
+                <a:shade val="15000"/>
+              </a:schemeClr>
+            </a:lnRef>
+            <a:fillRef idx="1">
+              <a:schemeClr val="accent1"/>
+            </a:fillRef>
+            <a:effectRef idx="0">
+              <a:schemeClr val="accent1"/>
+            </a:effectRef>
+            <a:fontRef idx="minor">
+              <a:schemeClr val="lt1"/>
+            </a:fontRef>
+          </p:style>
+          <p:txBody>
+            <a:bodyPr rtlCol="0" anchor="ctr"/>
+            <a:lstStyle/>
+            <a:p>
+              <a:pPr algn="ctr"/>
+              <a:endParaRPr lang="zh-CN" altLang="en-US" sz="1600"/>
+            </a:p>
+          </p:txBody>
+        </p:sp>
+        <p:sp>
+          <p:nvSpPr>
+            <p:cNvPr id="21" name="文本框 20">
+              <a:extLst>
+                <a:ext uri="{FF2B5EF4-FFF2-40B4-BE49-F238E27FC236}">
+                  <a16:creationId xmlns:a16="http://schemas.microsoft.com/office/drawing/2014/main" id="{315322B1-A186-573C-F479-389251BFD4D0}"/>
+                </a:ext>
+              </a:extLst>
+            </p:cNvPr>
+            <p:cNvSpPr txBox="1"/>
+            <p:nvPr/>
+          </p:nvSpPr>
+          <p:spPr>
+            <a:xfrm>
+              <a:off x="4694903" y="180534"/>
+              <a:ext cx="1391869" cy="584775"/>
+            </a:xfrm>
+            <a:prstGeom prst="rect">
+              <a:avLst/>
+            </a:prstGeom>
+            <a:noFill/>
+          </p:spPr>
+          <p:txBody>
+            <a:bodyPr wrap="square" rtlCol="0">
+              <a:spAutoFit/>
+            </a:bodyPr>
+            <a:lstStyle/>
+            <a:p>
+              <a:pPr algn="ctr"/>
+              <a:r>
+                <a:rPr lang="zh-CN" altLang="en-US" sz="1600" dirty="0">
+                  <a:latin typeface="宋体" panose="02010600030101010101" pitchFamily="2" charset="-122"/>
+                  <a:ea typeface="宋体" panose="02010600030101010101" pitchFamily="2" charset="-122"/>
+                </a:rPr>
+                <a:t>编码器</a:t>
+              </a:r>
+              <a:endParaRPr lang="en-US" altLang="zh-CN" sz="1600" dirty="0">
+                <a:latin typeface="宋体" panose="02010600030101010101" pitchFamily="2" charset="-122"/>
+                <a:ea typeface="宋体" panose="02010600030101010101" pitchFamily="2" charset="-122"/>
+              </a:endParaRPr>
+            </a:p>
+            <a:p>
+              <a:pPr algn="ctr"/>
+              <a:r>
+                <a:rPr lang="zh-CN" altLang="en-US" sz="1600" dirty="0">
+                  <a:latin typeface="宋体" panose="02010600030101010101" pitchFamily="2" charset="-122"/>
+                  <a:ea typeface="宋体" panose="02010600030101010101" pitchFamily="2" charset="-122"/>
+                </a:rPr>
+                <a:t>接口</a:t>
               </a:r>
             </a:p>
           </p:txBody>
@@ -4424,10 +4085,10 @@
       </p:grpSpPr>
       <p:grpSp>
         <p:nvGrpSpPr>
-          <p:cNvPr id="47" name="组合 46">
+          <p:cNvPr id="3" name="组合 2">
             <a:extLst>
               <a:ext uri="{FF2B5EF4-FFF2-40B4-BE49-F238E27FC236}">
-                <a16:creationId xmlns:a16="http://schemas.microsoft.com/office/drawing/2014/main" id="{4C27C1CF-3A50-2625-FC38-E1C78936D2B1}"/>
+                <a16:creationId xmlns:a16="http://schemas.microsoft.com/office/drawing/2014/main" id="{9B3BC083-EDC4-B64C-1FC3-D48DED54375E}"/>
               </a:ext>
             </a:extLst>
           </p:cNvPr>
@@ -4436,10 +4097,10 @@
         </p:nvGrpSpPr>
         <p:grpSpPr>
           <a:xfrm>
-            <a:off x="183943" y="1177608"/>
-            <a:ext cx="5862784" cy="3799840"/>
-            <a:chOff x="6127543" y="1153687"/>
-            <a:chExt cx="5862784" cy="3799840"/>
+            <a:off x="0" y="130810"/>
+            <a:ext cx="6237019" cy="3799840"/>
+            <a:chOff x="25358" y="0"/>
+            <a:chExt cx="6237019" cy="3799840"/>
           </a:xfrm>
         </p:grpSpPr>
         <p:pic>
@@ -4481,7 +4142,7 @@
           </p:blipFill>
           <p:spPr>
             <a:xfrm>
-              <a:off x="6925227" y="1153687"/>
+              <a:off x="979495" y="0"/>
               <a:ext cx="4145280" cy="3799840"/>
             </a:xfrm>
             <a:prstGeom prst="rect">
@@ -4503,13 +4164,13 @@
           </p:nvSpPr>
           <p:spPr>
             <a:xfrm flipH="1">
-              <a:off x="11063228" y="4015945"/>
-              <a:ext cx="857308" cy="384459"/>
+              <a:off x="5061351" y="2862259"/>
+              <a:ext cx="987021" cy="484191"/>
             </a:xfrm>
             <a:prstGeom prst="wedgeRectCallout">
               <a:avLst>
-                <a:gd name="adj1" fmla="val 158163"/>
-                <a:gd name="adj2" fmla="val 125594"/>
+                <a:gd name="adj1" fmla="val 144653"/>
+                <a:gd name="adj2" fmla="val 111168"/>
               </a:avLst>
             </a:prstGeom>
             <a:solidFill>
@@ -4537,7 +4198,7 @@
             <a:lstStyle/>
             <a:p>
               <a:pPr algn="ctr"/>
-              <a:endParaRPr lang="zh-CN" altLang="en-US"/>
+              <a:endParaRPr lang="zh-CN" altLang="en-US" sz="1600"/>
             </a:p>
           </p:txBody>
         </p:sp>
@@ -4555,8 +4216,8 @@
           </p:nvSpPr>
           <p:spPr>
             <a:xfrm flipH="1">
-              <a:off x="11079527" y="1696734"/>
-              <a:ext cx="848948" cy="259647"/>
+              <a:off x="5049290" y="543048"/>
+              <a:ext cx="1000763" cy="259647"/>
             </a:xfrm>
             <a:prstGeom prst="wedgeRectCallout">
               <a:avLst>
@@ -4589,7 +4250,7 @@
             <a:lstStyle/>
             <a:p>
               <a:pPr algn="ctr"/>
-              <a:endParaRPr lang="zh-CN" altLang="en-US"/>
+              <a:endParaRPr lang="zh-CN" altLang="en-US" sz="1600"/>
             </a:p>
           </p:txBody>
         </p:sp>
@@ -4607,8 +4268,8 @@
           </p:nvSpPr>
           <p:spPr>
             <a:xfrm>
-              <a:off x="6164055" y="1254816"/>
-              <a:ext cx="848948" cy="259647"/>
+              <a:off x="162859" y="101130"/>
+              <a:ext cx="904412" cy="259647"/>
             </a:xfrm>
             <a:prstGeom prst="wedgeRectCallout">
               <a:avLst>
@@ -4641,7 +4302,7 @@
             <a:lstStyle/>
             <a:p>
               <a:pPr algn="ctr"/>
-              <a:endParaRPr lang="zh-CN" altLang="en-US"/>
+              <a:endParaRPr lang="zh-CN" altLang="en-US" sz="1600"/>
             </a:p>
           </p:txBody>
         </p:sp>
@@ -4659,8 +4320,8 @@
           </p:nvSpPr>
           <p:spPr>
             <a:xfrm>
-              <a:off x="6164055" y="1687976"/>
-              <a:ext cx="848948" cy="259647"/>
+              <a:off x="162859" y="534290"/>
+              <a:ext cx="904412" cy="259647"/>
             </a:xfrm>
             <a:prstGeom prst="wedgeRectCallout">
               <a:avLst>
@@ -4693,7 +4354,7 @@
             <a:lstStyle/>
             <a:p>
               <a:pPr algn="ctr"/>
-              <a:endParaRPr lang="zh-CN" altLang="en-US"/>
+              <a:endParaRPr lang="zh-CN" altLang="en-US" sz="1600"/>
             </a:p>
           </p:txBody>
         </p:sp>
@@ -4711,8 +4372,8 @@
           </p:nvSpPr>
           <p:spPr>
             <a:xfrm>
-              <a:off x="6167438" y="4078352"/>
-              <a:ext cx="848948" cy="259647"/>
+              <a:off x="162858" y="2924666"/>
+              <a:ext cx="907796" cy="259647"/>
             </a:xfrm>
             <a:prstGeom prst="wedgeRectCallout">
               <a:avLst>
@@ -4745,7 +4406,7 @@
             <a:lstStyle/>
             <a:p>
               <a:pPr algn="ctr"/>
-              <a:endParaRPr lang="zh-CN" altLang="en-US"/>
+              <a:endParaRPr lang="zh-CN" altLang="en-US" sz="1600"/>
             </a:p>
           </p:txBody>
         </p:sp>
@@ -4763,8 +4424,8 @@
           </p:nvSpPr>
           <p:spPr>
             <a:xfrm>
-              <a:off x="6183985" y="4078351"/>
-              <a:ext cx="907796" cy="276999"/>
+              <a:off x="118352" y="2885211"/>
+              <a:ext cx="1065614" cy="338554"/>
             </a:xfrm>
             <a:prstGeom prst="rect">
               <a:avLst/>
@@ -4778,7 +4439,7 @@
             <a:lstStyle/>
             <a:p>
               <a:r>
-                <a:rPr lang="zh-CN" altLang="en-US" sz="1200" dirty="0">
+                <a:rPr lang="zh-CN" altLang="en-US" sz="1600" dirty="0">
                   <a:latin typeface="宋体" panose="02010600030101010101" pitchFamily="2" charset="-122"/>
                   <a:ea typeface="宋体" panose="02010600030101010101" pitchFamily="2" charset="-122"/>
                 </a:rPr>
@@ -4801,8 +4462,8 @@
           </p:nvSpPr>
           <p:spPr>
             <a:xfrm>
-              <a:off x="6183990" y="1678591"/>
-              <a:ext cx="907796" cy="276999"/>
+              <a:off x="107647" y="493470"/>
+              <a:ext cx="1074355" cy="338554"/>
             </a:xfrm>
             <a:prstGeom prst="rect">
               <a:avLst/>
@@ -4816,7 +4477,7 @@
             <a:lstStyle/>
             <a:p>
               <a:r>
-                <a:rPr lang="en-US" altLang="zh-CN" sz="1200" dirty="0">
+                <a:rPr lang="en-US" altLang="zh-CN" sz="1600" dirty="0">
                   <a:latin typeface="Times New Roman" panose="02020603050405020304" pitchFamily="18" charset="0"/>
                   <a:ea typeface="宋体" panose="02010600030101010101" pitchFamily="2" charset="-122"/>
                   <a:cs typeface="Times New Roman" panose="02020603050405020304" pitchFamily="18" charset="0"/>
@@ -4824,7 +4485,7 @@
                 <a:t>SWD</a:t>
               </a:r>
               <a:r>
-                <a:rPr lang="zh-CN" altLang="en-US" sz="1200" dirty="0">
+                <a:rPr lang="zh-CN" altLang="en-US" sz="1600" dirty="0">
                   <a:latin typeface="宋体" panose="02010600030101010101" pitchFamily="2" charset="-122"/>
                   <a:ea typeface="宋体" panose="02010600030101010101" pitchFamily="2" charset="-122"/>
                 </a:rPr>
@@ -4847,8 +4508,8 @@
           </p:nvSpPr>
           <p:spPr>
             <a:xfrm flipH="1">
-              <a:off x="11062146" y="1275301"/>
-              <a:ext cx="848948" cy="259647"/>
+              <a:off x="5049290" y="121615"/>
+              <a:ext cx="1000761" cy="259647"/>
             </a:xfrm>
             <a:prstGeom prst="wedgeRectCallout">
               <a:avLst>
@@ -4881,7 +4542,7 @@
             <a:lstStyle/>
             <a:p>
               <a:pPr algn="ctr"/>
-              <a:endParaRPr lang="zh-CN" altLang="en-US"/>
+              <a:endParaRPr lang="zh-CN" altLang="en-US" sz="1600"/>
             </a:p>
           </p:txBody>
         </p:sp>
@@ -4899,13 +4560,13 @@
           </p:nvSpPr>
           <p:spPr>
             <a:xfrm>
-              <a:off x="6167438" y="2377465"/>
-              <a:ext cx="848948" cy="259647"/>
+              <a:off x="162858" y="1348495"/>
+              <a:ext cx="904413" cy="461255"/>
             </a:xfrm>
             <a:prstGeom prst="wedgeRectCallout">
               <a:avLst>
-                <a:gd name="adj1" fmla="val 267458"/>
-                <a:gd name="adj2" fmla="val 186547"/>
+                <a:gd name="adj1" fmla="val 262562"/>
+                <a:gd name="adj2" fmla="val 62342"/>
               </a:avLst>
             </a:prstGeom>
             <a:solidFill>
@@ -4933,7 +4594,7 @@
             <a:lstStyle/>
             <a:p>
               <a:pPr algn="ctr"/>
-              <a:endParaRPr lang="zh-CN" altLang="en-US"/>
+              <a:endParaRPr lang="zh-CN" altLang="en-US" sz="1600"/>
             </a:p>
           </p:txBody>
         </p:sp>
@@ -4951,8 +4612,8 @@
           </p:nvSpPr>
           <p:spPr>
             <a:xfrm>
-              <a:off x="11070507" y="1252101"/>
-              <a:ext cx="907796" cy="276999"/>
+              <a:off x="5001349" y="84500"/>
+              <a:ext cx="1261028" cy="338554"/>
             </a:xfrm>
             <a:prstGeom prst="rect">
               <a:avLst/>
@@ -4966,7 +4627,7 @@
             <a:lstStyle/>
             <a:p>
               <a:r>
-                <a:rPr lang="en-US" altLang="zh-CN" sz="1200" dirty="0">
+                <a:rPr lang="en-US" altLang="zh-CN" sz="1600" dirty="0">
                   <a:latin typeface="Times New Roman" panose="02020603050405020304" pitchFamily="18" charset="0"/>
                   <a:ea typeface="宋体" panose="02010600030101010101" pitchFamily="2" charset="-122"/>
                   <a:cs typeface="Times New Roman" panose="02020603050405020304" pitchFamily="18" charset="0"/>
@@ -4974,7 +4635,7 @@
                 <a:t>RS485</a:t>
               </a:r>
               <a:r>
-                <a:rPr lang="zh-CN" altLang="en-US" sz="1200" dirty="0">
+                <a:rPr lang="zh-CN" altLang="en-US" sz="1600" dirty="0">
                   <a:latin typeface="宋体" panose="02010600030101010101" pitchFamily="2" charset="-122"/>
                   <a:ea typeface="宋体" panose="02010600030101010101" pitchFamily="2" charset="-122"/>
                 </a:rPr>
@@ -4997,8 +4658,8 @@
           </p:nvSpPr>
           <p:spPr>
             <a:xfrm>
-              <a:off x="6167438" y="1237464"/>
-              <a:ext cx="907796" cy="276999"/>
+              <a:off x="107646" y="61675"/>
+              <a:ext cx="1361406" cy="338554"/>
             </a:xfrm>
             <a:prstGeom prst="rect">
               <a:avLst/>
@@ -5012,7 +4673,7 @@
             <a:lstStyle/>
             <a:p>
               <a:r>
-                <a:rPr lang="en-US" altLang="zh-CN" sz="1200" dirty="0">
+                <a:rPr lang="en-US" altLang="zh-CN" sz="1600" dirty="0">
                   <a:latin typeface="Times New Roman" panose="02020603050405020304" pitchFamily="18" charset="0"/>
                   <a:ea typeface="宋体" panose="02010600030101010101" pitchFamily="2" charset="-122"/>
                   <a:cs typeface="Times New Roman" panose="02020603050405020304" pitchFamily="18" charset="0"/>
@@ -5020,7 +4681,7 @@
                 <a:t>CAN</a:t>
               </a:r>
               <a:r>
-                <a:rPr lang="zh-CN" altLang="en-US" sz="1200" dirty="0">
+                <a:rPr lang="zh-CN" altLang="en-US" sz="1600" dirty="0">
                   <a:latin typeface="宋体" panose="02010600030101010101" pitchFamily="2" charset="-122"/>
                   <a:ea typeface="宋体" panose="02010600030101010101" pitchFamily="2" charset="-122"/>
                 </a:rPr>
@@ -5043,8 +4704,8 @@
           </p:nvSpPr>
           <p:spPr>
             <a:xfrm>
-              <a:off x="6127543" y="2364149"/>
-              <a:ext cx="1069310" cy="276999"/>
+              <a:off x="25358" y="1284623"/>
+              <a:ext cx="1238932" cy="584775"/>
             </a:xfrm>
             <a:prstGeom prst="rect">
               <a:avLst/>
@@ -5057,12 +4718,27 @@
             </a:bodyPr>
             <a:lstStyle/>
             <a:p>
+              <a:pPr algn="ctr"/>
               <a:r>
-                <a:rPr lang="zh-CN" altLang="en-US" sz="1200" dirty="0">
+                <a:rPr lang="zh-CN" altLang="en-US" sz="1600" dirty="0">
                   <a:latin typeface="宋体" panose="02010600030101010101" pitchFamily="2" charset="-122"/>
                   <a:ea typeface="宋体" panose="02010600030101010101" pitchFamily="2" charset="-122"/>
                 </a:rPr>
-                <a:t>编码器芯片</a:t>
+                <a:t>编码器</a:t>
+              </a:r>
+              <a:endParaRPr lang="en-US" altLang="zh-CN" sz="1600" dirty="0">
+                <a:latin typeface="宋体" panose="02010600030101010101" pitchFamily="2" charset="-122"/>
+                <a:ea typeface="宋体" panose="02010600030101010101" pitchFamily="2" charset="-122"/>
+              </a:endParaRPr>
+            </a:p>
+            <a:p>
+              <a:pPr algn="ctr"/>
+              <a:r>
+                <a:rPr lang="zh-CN" altLang="en-US" sz="1600" dirty="0">
+                  <a:latin typeface="宋体" panose="02010600030101010101" pitchFamily="2" charset="-122"/>
+                  <a:ea typeface="宋体" panose="02010600030101010101" pitchFamily="2" charset="-122"/>
+                </a:rPr>
+                <a:t>芯片</a:t>
               </a:r>
             </a:p>
           </p:txBody>
@@ -5081,8 +4757,8 @@
           </p:nvSpPr>
           <p:spPr>
             <a:xfrm>
-              <a:off x="11082531" y="1687268"/>
-              <a:ext cx="907796" cy="276999"/>
+              <a:off x="5061352" y="492434"/>
+              <a:ext cx="1141021" cy="338554"/>
             </a:xfrm>
             <a:prstGeom prst="rect">
               <a:avLst/>
@@ -5096,7 +4772,7 @@
             <a:lstStyle/>
             <a:p>
               <a:r>
-                <a:rPr lang="zh-CN" altLang="en-US" sz="1200" dirty="0">
+                <a:rPr lang="zh-CN" altLang="en-US" sz="1600" dirty="0">
                   <a:latin typeface="宋体" panose="02010600030101010101" pitchFamily="2" charset="-122"/>
                   <a:ea typeface="宋体" panose="02010600030101010101" pitchFamily="2" charset="-122"/>
                 </a:rPr>
@@ -5119,8 +4795,8 @@
           </p:nvSpPr>
           <p:spPr>
             <a:xfrm>
-              <a:off x="10959548" y="3977341"/>
-              <a:ext cx="1000760" cy="461665"/>
+              <a:off x="5086194" y="2811966"/>
+              <a:ext cx="1000760" cy="584775"/>
             </a:xfrm>
             <a:prstGeom prst="rect">
               <a:avLst/>
@@ -5135,13 +4811,13 @@
             <a:p>
               <a:pPr algn="ctr"/>
               <a:r>
-                <a:rPr lang="zh-CN" altLang="en-US" sz="1200" dirty="0">
+                <a:rPr lang="zh-CN" altLang="en-US" sz="1600" dirty="0">
                   <a:latin typeface="宋体" panose="02010600030101010101" pitchFamily="2" charset="-122"/>
                   <a:ea typeface="宋体" panose="02010600030101010101" pitchFamily="2" charset="-122"/>
                 </a:rPr>
                 <a:t>电机三相</a:t>
               </a:r>
-              <a:endParaRPr lang="en-US" altLang="zh-CN" sz="1200" dirty="0">
+              <a:endParaRPr lang="en-US" altLang="zh-CN" sz="1600" dirty="0">
                 <a:latin typeface="宋体" panose="02010600030101010101" pitchFamily="2" charset="-122"/>
                 <a:ea typeface="宋体" panose="02010600030101010101" pitchFamily="2" charset="-122"/>
               </a:endParaRPr>
@@ -5149,7 +4825,7 @@
             <a:p>
               <a:pPr algn="ctr"/>
               <a:r>
-                <a:rPr lang="zh-CN" altLang="en-US" sz="1200" dirty="0">
+                <a:rPr lang="zh-CN" altLang="en-US" sz="1600" dirty="0">
                   <a:latin typeface="宋体" panose="02010600030101010101" pitchFamily="2" charset="-122"/>
                   <a:ea typeface="宋体" panose="02010600030101010101" pitchFamily="2" charset="-122"/>
                 </a:rPr>
@@ -5172,10 +4848,40 @@
 </p:sld>
 </file>
 
+<file path=ppt/slides/slide3.xml><?xml version="1.0" encoding="utf-8"?>
+<p:sld xmlns:a="http://schemas.openxmlformats.org/drawingml/2006/main" xmlns:r="http://schemas.openxmlformats.org/officeDocument/2006/relationships" xmlns:p="http://schemas.openxmlformats.org/presentationml/2006/main">
+  <p:cSld>
+    <p:spTree>
+      <p:nvGrpSpPr>
+        <p:cNvPr id="1" name=""/>
+        <p:cNvGrpSpPr/>
+        <p:nvPr/>
+      </p:nvGrpSpPr>
+      <p:grpSpPr>
+        <a:xfrm>
+          <a:off x="0" y="0"/>
+          <a:ext cx="0" cy="0"/>
+          <a:chOff x="0" y="0"/>
+          <a:chExt cx="0" cy="0"/>
+        </a:xfrm>
+      </p:grpSpPr>
+    </p:spTree>
+    <p:extLst>
+      <p:ext uri="{BB962C8B-B14F-4D97-AF65-F5344CB8AC3E}">
+        <p14:creationId xmlns:p14="http://schemas.microsoft.com/office/powerpoint/2010/main" val="1682432078"/>
+      </p:ext>
+    </p:extLst>
+  </p:cSld>
+  <p:clrMapOvr>
+    <a:masterClrMapping/>
+  </p:clrMapOvr>
+</p:sld>
+</file>
+
 <file path=ppt/theme/theme1.xml><?xml version="1.0" encoding="utf-8"?>
 <a:theme xmlns:a="http://schemas.openxmlformats.org/drawingml/2006/main" name="Office 主题​​">
   <a:themeElements>
-    <a:clrScheme name="Office">
+    <a:clrScheme name="Office 主题​​">
       <a:dk1>
         <a:sysClr val="windowText" lastClr="000000"/>
       </a:dk1>
@@ -5213,9 +4919,9 @@
         <a:srgbClr val="954F72"/>
       </a:folHlink>
     </a:clrScheme>
-    <a:fontScheme name="Office">
+    <a:fontScheme name="Office 主题​​">
       <a:majorFont>
-        <a:latin typeface="等线 Light" panose="020F0302020204030204"/>
+        <a:latin typeface="Calibri Light" panose="020F0302020204030204"/>
         <a:ea typeface=""/>
         <a:cs typeface=""/>
         <a:font script="Jpan" typeface="游ゴシック Light"/>
@@ -5248,26 +4954,9 @@
         <a:font script="Viet" typeface="Times New Roman"/>
         <a:font script="Uigh" typeface="Microsoft Uighur"/>
         <a:font script="Geor" typeface="Sylfaen"/>
-        <a:font script="Armn" typeface="Arial"/>
-        <a:font script="Bugi" typeface="Leelawadee UI"/>
-        <a:font script="Bopo" typeface="Microsoft JhengHei"/>
-        <a:font script="Java" typeface="Javanese Text"/>
-        <a:font script="Lisu" typeface="Segoe UI"/>
-        <a:font script="Mymr" typeface="Myanmar Text"/>
-        <a:font script="Nkoo" typeface="Ebrima"/>
-        <a:font script="Olck" typeface="Nirmala UI"/>
-        <a:font script="Osma" typeface="Ebrima"/>
-        <a:font script="Phag" typeface="Phagspa"/>
-        <a:font script="Syrn" typeface="Estrangelo Edessa"/>
-        <a:font script="Syrj" typeface="Estrangelo Edessa"/>
-        <a:font script="Syre" typeface="Estrangelo Edessa"/>
-        <a:font script="Sora" typeface="Nirmala UI"/>
-        <a:font script="Tale" typeface="Microsoft Tai Le"/>
-        <a:font script="Talu" typeface="Microsoft New Tai Lue"/>
-        <a:font script="Tfng" typeface="Ebrima"/>
       </a:majorFont>
       <a:minorFont>
-        <a:latin typeface="等线" panose="020F0502020204030204"/>
+        <a:latin typeface="Calibri" panose="020F0502020204030204"/>
         <a:ea typeface=""/>
         <a:cs typeface=""/>
         <a:font script="Jpan" typeface="游ゴシック"/>
@@ -5300,26 +4989,9 @@
         <a:font script="Viet" typeface="Arial"/>
         <a:font script="Uigh" typeface="Microsoft Uighur"/>
         <a:font script="Geor" typeface="Sylfaen"/>
-        <a:font script="Armn" typeface="Arial"/>
-        <a:font script="Bugi" typeface="Leelawadee UI"/>
-        <a:font script="Bopo" typeface="Microsoft JhengHei"/>
-        <a:font script="Java" typeface="Javanese Text"/>
-        <a:font script="Lisu" typeface="Segoe UI"/>
-        <a:font script="Mymr" typeface="Myanmar Text"/>
-        <a:font script="Nkoo" typeface="Ebrima"/>
-        <a:font script="Olck" typeface="Nirmala UI"/>
-        <a:font script="Osma" typeface="Ebrima"/>
-        <a:font script="Phag" typeface="Phagspa"/>
-        <a:font script="Syrn" typeface="Estrangelo Edessa"/>
-        <a:font script="Syrj" typeface="Estrangelo Edessa"/>
-        <a:font script="Syre" typeface="Estrangelo Edessa"/>
-        <a:font script="Sora" typeface="Nirmala UI"/>
-        <a:font script="Tale" typeface="Microsoft Tai Le"/>
-        <a:font script="Talu" typeface="Microsoft New Tai Lue"/>
-        <a:font script="Tfng" typeface="Ebrima"/>
       </a:minorFont>
     </a:fontScheme>
-    <a:fmtScheme name="Office">
+    <a:fmtScheme name="Office 主题​​">
       <a:fillStyleLst>
         <a:solidFill>
           <a:schemeClr val="phClr"/>
@@ -5461,7 +5133,7 @@
   <a:extraClrSchemeLst/>
   <a:extLst>
     <a:ext uri="{05A4C25C-085E-4340-85A3-A5531E510DB2}">
-      <thm15:themeFamily xmlns:thm15="http://schemas.microsoft.com/office/thememl/2012/main" name="Office Theme" id="{62F939B6-93AF-4DB8-9C6B-D6C7DFDC589F}" vid="{4A3C46E8-61CC-4603-A589-7422A47A8E4A}"/>
+      <thm15:themeFamily xmlns:thm15="http://schemas.microsoft.com/office/thememl/2012/main" name="Office 2013 - 2022 Theme" id="{62F939B6-93AF-4DB8-9C6B-D6C7DFDC589F}" vid="{4A3C46E8-61CC-4603-A589-7422A47A8E4A}"/>
     </a:ext>
   </a:extLst>
 </a:theme>
